--- a/봉틈이.pptx
+++ b/봉틈이.pptx
@@ -170,10 +170,9 @@
           </a:lstStyle>
           <a:p>
             <a:r>
-              <a:rPr lang="ko-KR" altLang="en-US" smtClean="0"/>
+              <a:rPr lang="ko-KR" altLang="en-US"/>
               <a:t>마스터 제목 스타일 편집</a:t>
             </a:r>
-            <a:endParaRPr lang="ko-KR" altLang="en-US"/>
           </a:p>
         </p:txBody>
       </p:sp>
@@ -235,10 +234,9 @@
           </a:lstStyle>
           <a:p>
             <a:r>
-              <a:rPr lang="ko-KR" altLang="en-US" smtClean="0"/>
+              <a:rPr lang="ko-KR" altLang="en-US"/>
               <a:t>클릭하여 마스터 부제목 스타일 편집</a:t>
             </a:r>
-            <a:endParaRPr lang="ko-KR" altLang="en-US"/>
           </a:p>
         </p:txBody>
       </p:sp>
@@ -259,7 +257,7 @@
           <a:p>
             <a:fld id="{05CBA7A7-57FB-4650-82A7-4BB91E8CAE47}" type="datetimeFigureOut">
               <a:rPr lang="ko-KR" altLang="en-US" smtClean="0"/>
-              <a:t>2025-01-16</a:t>
+              <a:t>2025-01-19</a:t>
             </a:fld>
             <a:endParaRPr lang="ko-KR" altLang="en-US"/>
           </a:p>
@@ -353,10 +351,9 @@
           <a:lstStyle/>
           <a:p>
             <a:r>
-              <a:rPr lang="ko-KR" altLang="en-US" smtClean="0"/>
+              <a:rPr lang="ko-KR" altLang="en-US"/>
               <a:t>마스터 제목 스타일 편집</a:t>
             </a:r>
-            <a:endParaRPr lang="ko-KR" altLang="en-US"/>
           </a:p>
         </p:txBody>
       </p:sp>
@@ -377,38 +374,37 @@
           <a:p>
             <a:pPr lvl="0"/>
             <a:r>
-              <a:rPr lang="ko-KR" altLang="en-US" smtClean="0"/>
+              <a:rPr lang="ko-KR" altLang="en-US"/>
               <a:t>마스터 텍스트 스타일 편집</a:t>
             </a:r>
           </a:p>
           <a:p>
             <a:pPr lvl="1"/>
             <a:r>
-              <a:rPr lang="ko-KR" altLang="en-US" smtClean="0"/>
+              <a:rPr lang="ko-KR" altLang="en-US"/>
               <a:t>둘째 수준</a:t>
             </a:r>
           </a:p>
           <a:p>
             <a:pPr lvl="2"/>
             <a:r>
-              <a:rPr lang="ko-KR" altLang="en-US" smtClean="0"/>
+              <a:rPr lang="ko-KR" altLang="en-US"/>
               <a:t>셋째 수준</a:t>
             </a:r>
           </a:p>
           <a:p>
             <a:pPr lvl="3"/>
             <a:r>
-              <a:rPr lang="ko-KR" altLang="en-US" smtClean="0"/>
+              <a:rPr lang="ko-KR" altLang="en-US"/>
               <a:t>넷째 수준</a:t>
             </a:r>
           </a:p>
           <a:p>
             <a:pPr lvl="4"/>
             <a:r>
-              <a:rPr lang="ko-KR" altLang="en-US" smtClean="0"/>
+              <a:rPr lang="ko-KR" altLang="en-US"/>
               <a:t>다섯째 수준</a:t>
             </a:r>
-            <a:endParaRPr lang="ko-KR" altLang="en-US"/>
           </a:p>
         </p:txBody>
       </p:sp>
@@ -429,7 +425,7 @@
           <a:p>
             <a:fld id="{05CBA7A7-57FB-4650-82A7-4BB91E8CAE47}" type="datetimeFigureOut">
               <a:rPr lang="ko-KR" altLang="en-US" smtClean="0"/>
-              <a:t>2025-01-16</a:t>
+              <a:t>2025-01-19</a:t>
             </a:fld>
             <a:endParaRPr lang="ko-KR" altLang="en-US"/>
           </a:p>
@@ -528,10 +524,9 @@
           <a:lstStyle/>
           <a:p>
             <a:r>
-              <a:rPr lang="ko-KR" altLang="en-US" smtClean="0"/>
+              <a:rPr lang="ko-KR" altLang="en-US"/>
               <a:t>마스터 제목 스타일 편집</a:t>
             </a:r>
-            <a:endParaRPr lang="ko-KR" altLang="en-US"/>
           </a:p>
         </p:txBody>
       </p:sp>
@@ -557,38 +552,37 @@
           <a:p>
             <a:pPr lvl="0"/>
             <a:r>
-              <a:rPr lang="ko-KR" altLang="en-US" smtClean="0"/>
+              <a:rPr lang="ko-KR" altLang="en-US"/>
               <a:t>마스터 텍스트 스타일 편집</a:t>
             </a:r>
           </a:p>
           <a:p>
             <a:pPr lvl="1"/>
             <a:r>
-              <a:rPr lang="ko-KR" altLang="en-US" smtClean="0"/>
+              <a:rPr lang="ko-KR" altLang="en-US"/>
               <a:t>둘째 수준</a:t>
             </a:r>
           </a:p>
           <a:p>
             <a:pPr lvl="2"/>
             <a:r>
-              <a:rPr lang="ko-KR" altLang="en-US" smtClean="0"/>
+              <a:rPr lang="ko-KR" altLang="en-US"/>
               <a:t>셋째 수준</a:t>
             </a:r>
           </a:p>
           <a:p>
             <a:pPr lvl="3"/>
             <a:r>
-              <a:rPr lang="ko-KR" altLang="en-US" smtClean="0"/>
+              <a:rPr lang="ko-KR" altLang="en-US"/>
               <a:t>넷째 수준</a:t>
             </a:r>
           </a:p>
           <a:p>
             <a:pPr lvl="4"/>
             <a:r>
-              <a:rPr lang="ko-KR" altLang="en-US" smtClean="0"/>
+              <a:rPr lang="ko-KR" altLang="en-US"/>
               <a:t>다섯째 수준</a:t>
             </a:r>
-            <a:endParaRPr lang="ko-KR" altLang="en-US"/>
           </a:p>
         </p:txBody>
       </p:sp>
@@ -609,7 +603,7 @@
           <a:p>
             <a:fld id="{05CBA7A7-57FB-4650-82A7-4BB91E8CAE47}" type="datetimeFigureOut">
               <a:rPr lang="ko-KR" altLang="en-US" smtClean="0"/>
-              <a:t>2025-01-16</a:t>
+              <a:t>2025-01-19</a:t>
             </a:fld>
             <a:endParaRPr lang="ko-KR" altLang="en-US"/>
           </a:p>
@@ -703,10 +697,9 @@
           <a:lstStyle/>
           <a:p>
             <a:r>
-              <a:rPr lang="ko-KR" altLang="en-US" smtClean="0"/>
+              <a:rPr lang="ko-KR" altLang="en-US"/>
               <a:t>마스터 제목 스타일 편집</a:t>
             </a:r>
-            <a:endParaRPr lang="ko-KR" altLang="en-US"/>
           </a:p>
         </p:txBody>
       </p:sp>
@@ -727,38 +720,37 @@
           <a:p>
             <a:pPr lvl="0"/>
             <a:r>
-              <a:rPr lang="ko-KR" altLang="en-US" smtClean="0"/>
+              <a:rPr lang="ko-KR" altLang="en-US"/>
               <a:t>마스터 텍스트 스타일 편집</a:t>
             </a:r>
           </a:p>
           <a:p>
             <a:pPr lvl="1"/>
             <a:r>
-              <a:rPr lang="ko-KR" altLang="en-US" smtClean="0"/>
+              <a:rPr lang="ko-KR" altLang="en-US"/>
               <a:t>둘째 수준</a:t>
             </a:r>
           </a:p>
           <a:p>
             <a:pPr lvl="2"/>
             <a:r>
-              <a:rPr lang="ko-KR" altLang="en-US" smtClean="0"/>
+              <a:rPr lang="ko-KR" altLang="en-US"/>
               <a:t>셋째 수준</a:t>
             </a:r>
           </a:p>
           <a:p>
             <a:pPr lvl="3"/>
             <a:r>
-              <a:rPr lang="ko-KR" altLang="en-US" smtClean="0"/>
+              <a:rPr lang="ko-KR" altLang="en-US"/>
               <a:t>넷째 수준</a:t>
             </a:r>
           </a:p>
           <a:p>
             <a:pPr lvl="4"/>
             <a:r>
-              <a:rPr lang="ko-KR" altLang="en-US" smtClean="0"/>
+              <a:rPr lang="ko-KR" altLang="en-US"/>
               <a:t>다섯째 수준</a:t>
             </a:r>
-            <a:endParaRPr lang="ko-KR" altLang="en-US"/>
           </a:p>
         </p:txBody>
       </p:sp>
@@ -779,7 +771,7 @@
           <a:p>
             <a:fld id="{05CBA7A7-57FB-4650-82A7-4BB91E8CAE47}" type="datetimeFigureOut">
               <a:rPr lang="ko-KR" altLang="en-US" smtClean="0"/>
-              <a:t>2025-01-16</a:t>
+              <a:t>2025-01-19</a:t>
             </a:fld>
             <a:endParaRPr lang="ko-KR" altLang="en-US"/>
           </a:p>
@@ -882,10 +874,9 @@
           </a:lstStyle>
           <a:p>
             <a:r>
-              <a:rPr lang="ko-KR" altLang="en-US" smtClean="0"/>
+              <a:rPr lang="ko-KR" altLang="en-US"/>
               <a:t>마스터 제목 스타일 편집</a:t>
             </a:r>
-            <a:endParaRPr lang="ko-KR" altLang="en-US"/>
           </a:p>
         </p:txBody>
       </p:sp>
@@ -1002,7 +993,7 @@
           <a:p>
             <a:pPr lvl="0"/>
             <a:r>
-              <a:rPr lang="ko-KR" altLang="en-US" smtClean="0"/>
+              <a:rPr lang="ko-KR" altLang="en-US"/>
               <a:t>마스터 텍스트 스타일 편집</a:t>
             </a:r>
           </a:p>
@@ -1025,7 +1016,7 @@
           <a:p>
             <a:fld id="{05CBA7A7-57FB-4650-82A7-4BB91E8CAE47}" type="datetimeFigureOut">
               <a:rPr lang="ko-KR" altLang="en-US" smtClean="0"/>
-              <a:t>2025-01-16</a:t>
+              <a:t>2025-01-19</a:t>
             </a:fld>
             <a:endParaRPr lang="ko-KR" altLang="en-US"/>
           </a:p>
@@ -1119,10 +1110,9 @@
           <a:lstStyle/>
           <a:p>
             <a:r>
-              <a:rPr lang="ko-KR" altLang="en-US" smtClean="0"/>
+              <a:rPr lang="ko-KR" altLang="en-US"/>
               <a:t>마스터 제목 스타일 편집</a:t>
             </a:r>
-            <a:endParaRPr lang="ko-KR" altLang="en-US"/>
           </a:p>
         </p:txBody>
       </p:sp>
@@ -1148,38 +1138,37 @@
           <a:p>
             <a:pPr lvl="0"/>
             <a:r>
-              <a:rPr lang="ko-KR" altLang="en-US" smtClean="0"/>
+              <a:rPr lang="ko-KR" altLang="en-US"/>
               <a:t>마스터 텍스트 스타일 편집</a:t>
             </a:r>
           </a:p>
           <a:p>
             <a:pPr lvl="1"/>
             <a:r>
-              <a:rPr lang="ko-KR" altLang="en-US" smtClean="0"/>
+              <a:rPr lang="ko-KR" altLang="en-US"/>
               <a:t>둘째 수준</a:t>
             </a:r>
           </a:p>
           <a:p>
             <a:pPr lvl="2"/>
             <a:r>
-              <a:rPr lang="ko-KR" altLang="en-US" smtClean="0"/>
+              <a:rPr lang="ko-KR" altLang="en-US"/>
               <a:t>셋째 수준</a:t>
             </a:r>
           </a:p>
           <a:p>
             <a:pPr lvl="3"/>
             <a:r>
-              <a:rPr lang="ko-KR" altLang="en-US" smtClean="0"/>
+              <a:rPr lang="ko-KR" altLang="en-US"/>
               <a:t>넷째 수준</a:t>
             </a:r>
           </a:p>
           <a:p>
             <a:pPr lvl="4"/>
             <a:r>
-              <a:rPr lang="ko-KR" altLang="en-US" smtClean="0"/>
+              <a:rPr lang="ko-KR" altLang="en-US"/>
               <a:t>다섯째 수준</a:t>
             </a:r>
-            <a:endParaRPr lang="ko-KR" altLang="en-US"/>
           </a:p>
         </p:txBody>
       </p:sp>
@@ -1205,38 +1194,37 @@
           <a:p>
             <a:pPr lvl="0"/>
             <a:r>
-              <a:rPr lang="ko-KR" altLang="en-US" smtClean="0"/>
+              <a:rPr lang="ko-KR" altLang="en-US"/>
               <a:t>마스터 텍스트 스타일 편집</a:t>
             </a:r>
           </a:p>
           <a:p>
             <a:pPr lvl="1"/>
             <a:r>
-              <a:rPr lang="ko-KR" altLang="en-US" smtClean="0"/>
+              <a:rPr lang="ko-KR" altLang="en-US"/>
               <a:t>둘째 수준</a:t>
             </a:r>
           </a:p>
           <a:p>
             <a:pPr lvl="2"/>
             <a:r>
-              <a:rPr lang="ko-KR" altLang="en-US" smtClean="0"/>
+              <a:rPr lang="ko-KR" altLang="en-US"/>
               <a:t>셋째 수준</a:t>
             </a:r>
           </a:p>
           <a:p>
             <a:pPr lvl="3"/>
             <a:r>
-              <a:rPr lang="ko-KR" altLang="en-US" smtClean="0"/>
+              <a:rPr lang="ko-KR" altLang="en-US"/>
               <a:t>넷째 수준</a:t>
             </a:r>
           </a:p>
           <a:p>
             <a:pPr lvl="4"/>
             <a:r>
-              <a:rPr lang="ko-KR" altLang="en-US" smtClean="0"/>
+              <a:rPr lang="ko-KR" altLang="en-US"/>
               <a:t>다섯째 수준</a:t>
             </a:r>
-            <a:endParaRPr lang="ko-KR" altLang="en-US"/>
           </a:p>
         </p:txBody>
       </p:sp>
@@ -1257,7 +1245,7 @@
           <a:p>
             <a:fld id="{05CBA7A7-57FB-4650-82A7-4BB91E8CAE47}" type="datetimeFigureOut">
               <a:rPr lang="ko-KR" altLang="en-US" smtClean="0"/>
-              <a:t>2025-01-16</a:t>
+              <a:t>2025-01-19</a:t>
             </a:fld>
             <a:endParaRPr lang="ko-KR" altLang="en-US"/>
           </a:p>
@@ -1356,10 +1344,9 @@
           <a:lstStyle/>
           <a:p>
             <a:r>
-              <a:rPr lang="ko-KR" altLang="en-US" smtClean="0"/>
+              <a:rPr lang="ko-KR" altLang="en-US"/>
               <a:t>마스터 제목 스타일 편집</a:t>
             </a:r>
-            <a:endParaRPr lang="ko-KR" altLang="en-US"/>
           </a:p>
         </p:txBody>
       </p:sp>
@@ -1422,7 +1409,7 @@
           <a:p>
             <a:pPr lvl="0"/>
             <a:r>
-              <a:rPr lang="ko-KR" altLang="en-US" smtClean="0"/>
+              <a:rPr lang="ko-KR" altLang="en-US"/>
               <a:t>마스터 텍스트 스타일 편집</a:t>
             </a:r>
           </a:p>
@@ -1450,38 +1437,37 @@
           <a:p>
             <a:pPr lvl="0"/>
             <a:r>
-              <a:rPr lang="ko-KR" altLang="en-US" smtClean="0"/>
+              <a:rPr lang="ko-KR" altLang="en-US"/>
               <a:t>마스터 텍스트 스타일 편집</a:t>
             </a:r>
           </a:p>
           <a:p>
             <a:pPr lvl="1"/>
             <a:r>
-              <a:rPr lang="ko-KR" altLang="en-US" smtClean="0"/>
+              <a:rPr lang="ko-KR" altLang="en-US"/>
               <a:t>둘째 수준</a:t>
             </a:r>
           </a:p>
           <a:p>
             <a:pPr lvl="2"/>
             <a:r>
-              <a:rPr lang="ko-KR" altLang="en-US" smtClean="0"/>
+              <a:rPr lang="ko-KR" altLang="en-US"/>
               <a:t>셋째 수준</a:t>
             </a:r>
           </a:p>
           <a:p>
             <a:pPr lvl="3"/>
             <a:r>
-              <a:rPr lang="ko-KR" altLang="en-US" smtClean="0"/>
+              <a:rPr lang="ko-KR" altLang="en-US"/>
               <a:t>넷째 수준</a:t>
             </a:r>
           </a:p>
           <a:p>
             <a:pPr lvl="4"/>
             <a:r>
-              <a:rPr lang="ko-KR" altLang="en-US" smtClean="0"/>
+              <a:rPr lang="ko-KR" altLang="en-US"/>
               <a:t>다섯째 수준</a:t>
             </a:r>
-            <a:endParaRPr lang="ko-KR" altLang="en-US"/>
           </a:p>
         </p:txBody>
       </p:sp>
@@ -1544,7 +1530,7 @@
           <a:p>
             <a:pPr lvl="0"/>
             <a:r>
-              <a:rPr lang="ko-KR" altLang="en-US" smtClean="0"/>
+              <a:rPr lang="ko-KR" altLang="en-US"/>
               <a:t>마스터 텍스트 스타일 편집</a:t>
             </a:r>
           </a:p>
@@ -1572,38 +1558,37 @@
           <a:p>
             <a:pPr lvl="0"/>
             <a:r>
-              <a:rPr lang="ko-KR" altLang="en-US" smtClean="0"/>
+              <a:rPr lang="ko-KR" altLang="en-US"/>
               <a:t>마스터 텍스트 스타일 편집</a:t>
             </a:r>
           </a:p>
           <a:p>
             <a:pPr lvl="1"/>
             <a:r>
-              <a:rPr lang="ko-KR" altLang="en-US" smtClean="0"/>
+              <a:rPr lang="ko-KR" altLang="en-US"/>
               <a:t>둘째 수준</a:t>
             </a:r>
           </a:p>
           <a:p>
             <a:pPr lvl="2"/>
             <a:r>
-              <a:rPr lang="ko-KR" altLang="en-US" smtClean="0"/>
+              <a:rPr lang="ko-KR" altLang="en-US"/>
               <a:t>셋째 수준</a:t>
             </a:r>
           </a:p>
           <a:p>
             <a:pPr lvl="3"/>
             <a:r>
-              <a:rPr lang="ko-KR" altLang="en-US" smtClean="0"/>
+              <a:rPr lang="ko-KR" altLang="en-US"/>
               <a:t>넷째 수준</a:t>
             </a:r>
           </a:p>
           <a:p>
             <a:pPr lvl="4"/>
             <a:r>
-              <a:rPr lang="ko-KR" altLang="en-US" smtClean="0"/>
+              <a:rPr lang="ko-KR" altLang="en-US"/>
               <a:t>다섯째 수준</a:t>
             </a:r>
-            <a:endParaRPr lang="ko-KR" altLang="en-US"/>
           </a:p>
         </p:txBody>
       </p:sp>
@@ -1624,7 +1609,7 @@
           <a:p>
             <a:fld id="{05CBA7A7-57FB-4650-82A7-4BB91E8CAE47}" type="datetimeFigureOut">
               <a:rPr lang="ko-KR" altLang="en-US" smtClean="0"/>
-              <a:t>2025-01-16</a:t>
+              <a:t>2025-01-19</a:t>
             </a:fld>
             <a:endParaRPr lang="ko-KR" altLang="en-US"/>
           </a:p>
@@ -1718,10 +1703,9 @@
           <a:lstStyle/>
           <a:p>
             <a:r>
-              <a:rPr lang="ko-KR" altLang="en-US" smtClean="0"/>
+              <a:rPr lang="ko-KR" altLang="en-US"/>
               <a:t>마스터 제목 스타일 편집</a:t>
             </a:r>
-            <a:endParaRPr lang="ko-KR" altLang="en-US"/>
           </a:p>
         </p:txBody>
       </p:sp>
@@ -1742,7 +1726,7 @@
           <a:p>
             <a:fld id="{05CBA7A7-57FB-4650-82A7-4BB91E8CAE47}" type="datetimeFigureOut">
               <a:rPr lang="ko-KR" altLang="en-US" smtClean="0"/>
-              <a:t>2025-01-16</a:t>
+              <a:t>2025-01-19</a:t>
             </a:fld>
             <a:endParaRPr lang="ko-KR" altLang="en-US"/>
           </a:p>
@@ -1837,7 +1821,7 @@
           <a:p>
             <a:fld id="{05CBA7A7-57FB-4650-82A7-4BB91E8CAE47}" type="datetimeFigureOut">
               <a:rPr lang="ko-KR" altLang="en-US" smtClean="0"/>
-              <a:t>2025-01-16</a:t>
+              <a:t>2025-01-19</a:t>
             </a:fld>
             <a:endParaRPr lang="ko-KR" altLang="en-US"/>
           </a:p>
@@ -1940,10 +1924,9 @@
           </a:lstStyle>
           <a:p>
             <a:r>
-              <a:rPr lang="ko-KR" altLang="en-US" smtClean="0"/>
+              <a:rPr lang="ko-KR" altLang="en-US"/>
               <a:t>마스터 제목 스타일 편집</a:t>
             </a:r>
-            <a:endParaRPr lang="ko-KR" altLang="en-US"/>
           </a:p>
         </p:txBody>
       </p:sp>
@@ -1997,38 +1980,37 @@
           <a:p>
             <a:pPr lvl="0"/>
             <a:r>
-              <a:rPr lang="ko-KR" altLang="en-US" smtClean="0"/>
+              <a:rPr lang="ko-KR" altLang="en-US"/>
               <a:t>마스터 텍스트 스타일 편집</a:t>
             </a:r>
           </a:p>
           <a:p>
             <a:pPr lvl="1"/>
             <a:r>
-              <a:rPr lang="ko-KR" altLang="en-US" smtClean="0"/>
+              <a:rPr lang="ko-KR" altLang="en-US"/>
               <a:t>둘째 수준</a:t>
             </a:r>
           </a:p>
           <a:p>
             <a:pPr lvl="2"/>
             <a:r>
-              <a:rPr lang="ko-KR" altLang="en-US" smtClean="0"/>
+              <a:rPr lang="ko-KR" altLang="en-US"/>
               <a:t>셋째 수준</a:t>
             </a:r>
           </a:p>
           <a:p>
             <a:pPr lvl="3"/>
             <a:r>
-              <a:rPr lang="ko-KR" altLang="en-US" smtClean="0"/>
+              <a:rPr lang="ko-KR" altLang="en-US"/>
               <a:t>넷째 수준</a:t>
             </a:r>
           </a:p>
           <a:p>
             <a:pPr lvl="4"/>
             <a:r>
-              <a:rPr lang="ko-KR" altLang="en-US" smtClean="0"/>
+              <a:rPr lang="ko-KR" altLang="en-US"/>
               <a:t>다섯째 수준</a:t>
             </a:r>
-            <a:endParaRPr lang="ko-KR" altLang="en-US"/>
           </a:p>
         </p:txBody>
       </p:sp>
@@ -2091,7 +2073,7 @@
           <a:p>
             <a:pPr lvl="0"/>
             <a:r>
-              <a:rPr lang="ko-KR" altLang="en-US" smtClean="0"/>
+              <a:rPr lang="ko-KR" altLang="en-US"/>
               <a:t>마스터 텍스트 스타일 편집</a:t>
             </a:r>
           </a:p>
@@ -2114,7 +2096,7 @@
           <a:p>
             <a:fld id="{05CBA7A7-57FB-4650-82A7-4BB91E8CAE47}" type="datetimeFigureOut">
               <a:rPr lang="ko-KR" altLang="en-US" smtClean="0"/>
-              <a:t>2025-01-16</a:t>
+              <a:t>2025-01-19</a:t>
             </a:fld>
             <a:endParaRPr lang="ko-KR" altLang="en-US"/>
           </a:p>
@@ -2217,10 +2199,9 @@
           </a:lstStyle>
           <a:p>
             <a:r>
-              <a:rPr lang="ko-KR" altLang="en-US" smtClean="0"/>
+              <a:rPr lang="ko-KR" altLang="en-US"/>
               <a:t>마스터 제목 스타일 편집</a:t>
             </a:r>
-            <a:endParaRPr lang="ko-KR" altLang="en-US"/>
           </a:p>
         </p:txBody>
       </p:sp>
@@ -2344,7 +2325,7 @@
           <a:p>
             <a:pPr lvl="0"/>
             <a:r>
-              <a:rPr lang="ko-KR" altLang="en-US" smtClean="0"/>
+              <a:rPr lang="ko-KR" altLang="en-US"/>
               <a:t>마스터 텍스트 스타일 편집</a:t>
             </a:r>
           </a:p>
@@ -2367,7 +2348,7 @@
           <a:p>
             <a:fld id="{05CBA7A7-57FB-4650-82A7-4BB91E8CAE47}" type="datetimeFigureOut">
               <a:rPr lang="ko-KR" altLang="en-US" smtClean="0"/>
-              <a:t>2025-01-16</a:t>
+              <a:t>2025-01-19</a:t>
             </a:fld>
             <a:endParaRPr lang="ko-KR" altLang="en-US"/>
           </a:p>
@@ -2476,10 +2457,9 @@
           <a:lstStyle/>
           <a:p>
             <a:r>
-              <a:rPr lang="ko-KR" altLang="en-US" smtClean="0"/>
+              <a:rPr lang="ko-KR" altLang="en-US"/>
               <a:t>마스터 제목 스타일 편집</a:t>
             </a:r>
-            <a:endParaRPr lang="ko-KR" altLang="en-US"/>
           </a:p>
         </p:txBody>
       </p:sp>
@@ -2510,38 +2490,37 @@
           <a:p>
             <a:pPr lvl="0"/>
             <a:r>
-              <a:rPr lang="ko-KR" altLang="en-US" smtClean="0"/>
+              <a:rPr lang="ko-KR" altLang="en-US"/>
               <a:t>마스터 텍스트 스타일 편집</a:t>
             </a:r>
           </a:p>
           <a:p>
             <a:pPr lvl="1"/>
             <a:r>
-              <a:rPr lang="ko-KR" altLang="en-US" smtClean="0"/>
+              <a:rPr lang="ko-KR" altLang="en-US"/>
               <a:t>둘째 수준</a:t>
             </a:r>
           </a:p>
           <a:p>
             <a:pPr lvl="2"/>
             <a:r>
-              <a:rPr lang="ko-KR" altLang="en-US" smtClean="0"/>
+              <a:rPr lang="ko-KR" altLang="en-US"/>
               <a:t>셋째 수준</a:t>
             </a:r>
           </a:p>
           <a:p>
             <a:pPr lvl="3"/>
             <a:r>
-              <a:rPr lang="ko-KR" altLang="en-US" smtClean="0"/>
+              <a:rPr lang="ko-KR" altLang="en-US"/>
               <a:t>넷째 수준</a:t>
             </a:r>
           </a:p>
           <a:p>
             <a:pPr lvl="4"/>
             <a:r>
-              <a:rPr lang="ko-KR" altLang="en-US" smtClean="0"/>
+              <a:rPr lang="ko-KR" altLang="en-US"/>
               <a:t>다섯째 수준</a:t>
             </a:r>
-            <a:endParaRPr lang="ko-KR" altLang="en-US"/>
           </a:p>
         </p:txBody>
       </p:sp>
@@ -2580,7 +2559,7 @@
           <a:p>
             <a:fld id="{05CBA7A7-57FB-4650-82A7-4BB91E8CAE47}" type="datetimeFigureOut">
               <a:rPr lang="ko-KR" altLang="en-US" smtClean="0"/>
-              <a:t>2025-01-16</a:t>
+              <a:t>2025-01-19</a:t>
             </a:fld>
             <a:endParaRPr lang="ko-KR" altLang="en-US"/>
           </a:p>
@@ -3001,10 +2980,9 @@
           <a:lstStyle/>
           <a:p>
             <a:r>
-              <a:rPr lang="ko-KR" altLang="en-US" dirty="0" smtClean="0"/>
+              <a:rPr lang="ko-KR" altLang="en-US" dirty="0"/>
               <a:t>기획 구체화</a:t>
             </a:r>
-            <a:endParaRPr lang="ko-KR" altLang="en-US" dirty="0"/>
           </a:p>
         </p:txBody>
       </p:sp>
@@ -3024,7 +3002,7 @@
           <a:lstStyle/>
           <a:p>
             <a:r>
-              <a:rPr lang="ko-KR" altLang="en-US" dirty="0" err="1" smtClean="0"/>
+              <a:rPr lang="ko-KR" altLang="en-US" dirty="0" err="1"/>
               <a:t>봉틈이</a:t>
             </a:r>
             <a:endParaRPr lang="ko-KR" altLang="en-US" dirty="0"/>
@@ -3041,13 +3019,6 @@
   <p:clrMapOvr>
     <a:masterClrMapping/>
   </p:clrMapOvr>
-  <p:timing>
-    <p:tnLst>
-      <p:par>
-        <p:cTn id="1" dur="indefinite" restart="never" nodeType="tmRoot"/>
-      </p:par>
-    </p:tnLst>
-  </p:timing>
 </p:sld>
 </file>
 
@@ -3136,19 +3107,19 @@
           <a:lstStyle/>
           <a:p>
             <a:r>
-              <a:rPr lang="en-US" altLang="ko-KR" dirty="0" err="1" smtClean="0"/>
+              <a:rPr lang="en-US" altLang="ko-KR" dirty="0" err="1"/>
               <a:t>Feed.tsx</a:t>
             </a:r>
             <a:r>
-              <a:rPr lang="en-US" altLang="ko-KR" dirty="0" smtClean="0"/>
+              <a:rPr lang="en-US" altLang="ko-KR" dirty="0"/>
               <a:t>(AI </a:t>
             </a:r>
             <a:r>
-              <a:rPr lang="ko-KR" altLang="en-US" dirty="0" smtClean="0"/>
+              <a:rPr lang="ko-KR" altLang="en-US" dirty="0"/>
               <a:t>추천</a:t>
             </a:r>
             <a:r>
-              <a:rPr lang="en-US" altLang="ko-KR" dirty="0" smtClean="0"/>
+              <a:rPr lang="en-US" altLang="ko-KR" dirty="0"/>
               <a:t>)</a:t>
             </a:r>
             <a:endParaRPr lang="ko-KR" altLang="en-US" dirty="0"/>
@@ -3182,18 +3153,17 @@
               <a:buChar char="-"/>
             </a:pPr>
             <a:r>
-              <a:rPr lang="ko-KR" altLang="en-US" dirty="0" smtClean="0"/>
+              <a:rPr lang="ko-KR" altLang="en-US" dirty="0"/>
               <a:t>다른 사용자들 </a:t>
             </a:r>
             <a:r>
-              <a:rPr lang="ko-KR" altLang="en-US" dirty="0" err="1" smtClean="0"/>
+              <a:rPr lang="ko-KR" altLang="en-US" dirty="0" err="1"/>
               <a:t>후기글</a:t>
             </a:r>
             <a:r>
-              <a:rPr lang="ko-KR" altLang="en-US" dirty="0" smtClean="0"/>
+              <a:rPr lang="ko-KR" altLang="en-US" dirty="0"/>
               <a:t> 모음</a:t>
             </a:r>
-            <a:endParaRPr lang="ko-KR" altLang="en-US" dirty="0"/>
           </a:p>
         </p:txBody>
       </p:sp>
@@ -3440,7 +3410,7 @@
           <a:p>
             <a:pPr algn="ctr"/>
             <a:r>
-              <a:rPr lang="en-US" altLang="ko-KR" dirty="0" smtClean="0"/>
+              <a:rPr lang="en-US" altLang="ko-KR" dirty="0"/>
               <a:t>&lt;Review&gt;</a:t>
             </a:r>
           </a:p>
@@ -3506,13 +3476,6 @@
   <p:clrMapOvr>
     <a:masterClrMapping/>
   </p:clrMapOvr>
-  <p:timing>
-    <p:tnLst>
-      <p:par>
-        <p:cTn id="1" dur="indefinite" restart="never" nodeType="tmRoot"/>
-      </p:par>
-    </p:tnLst>
-  </p:timing>
 </p:sld>
 </file>
 
@@ -3601,27 +3564,27 @@
           <a:lstStyle/>
           <a:p>
             <a:r>
-              <a:rPr lang="en-US" altLang="ko-KR" dirty="0" err="1" smtClean="0"/>
+              <a:rPr lang="en-US" altLang="ko-KR" dirty="0" err="1"/>
               <a:t>MyPage.tsx</a:t>
             </a:r>
             <a:r>
-              <a:rPr lang="en-US" altLang="ko-KR" dirty="0" smtClean="0"/>
+              <a:rPr lang="en-US" altLang="ko-KR" dirty="0"/>
               <a:t>(</a:t>
             </a:r>
             <a:r>
-              <a:rPr lang="ko-KR" altLang="en-US" dirty="0" smtClean="0"/>
+              <a:rPr lang="ko-KR" altLang="en-US" dirty="0"/>
               <a:t>비회원</a:t>
             </a:r>
             <a:r>
-              <a:rPr lang="en-US" altLang="ko-KR" dirty="0" smtClean="0"/>
+              <a:rPr lang="en-US" altLang="ko-KR" dirty="0"/>
               <a:t>-</a:t>
             </a:r>
             <a:r>
-              <a:rPr lang="en-US" altLang="ko-KR" dirty="0" err="1" smtClean="0"/>
+              <a:rPr lang="en-US" altLang="ko-KR" dirty="0" err="1"/>
               <a:t>Login.tsx</a:t>
             </a:r>
             <a:r>
-              <a:rPr lang="en-US" altLang="ko-KR" dirty="0" smtClean="0"/>
+              <a:rPr lang="en-US" altLang="ko-KR" dirty="0"/>
               <a:t>)</a:t>
             </a:r>
             <a:endParaRPr lang="ko-KR" altLang="en-US" dirty="0"/>
@@ -3655,10 +3618,10 @@
               <a:buChar char="-"/>
             </a:pPr>
             <a:r>
-              <a:rPr lang="ko-KR" altLang="en-US" dirty="0" smtClean="0"/>
+              <a:rPr lang="ko-KR" altLang="en-US" dirty="0"/>
               <a:t>통계 페이지 이동 버튼</a:t>
             </a:r>
-            <a:endParaRPr lang="en-US" altLang="ko-KR" dirty="0" smtClean="0"/>
+            <a:endParaRPr lang="en-US" altLang="ko-KR" dirty="0"/>
           </a:p>
           <a:p>
             <a:pPr marL="285750" indent="-285750">
@@ -3673,18 +3636,18 @@
               <a:buChar char="-"/>
             </a:pPr>
             <a:r>
-              <a:rPr lang="ko-KR" altLang="en-US" dirty="0" smtClean="0"/>
+              <a:rPr lang="ko-KR" altLang="en-US" dirty="0"/>
               <a:t>자신의 </a:t>
             </a:r>
             <a:r>
-              <a:rPr lang="ko-KR" altLang="en-US" dirty="0" err="1" smtClean="0"/>
+              <a:rPr lang="ko-KR" altLang="en-US" dirty="0" err="1"/>
               <a:t>후기글</a:t>
             </a:r>
             <a:r>
-              <a:rPr lang="ko-KR" altLang="en-US" dirty="0" smtClean="0"/>
+              <a:rPr lang="ko-KR" altLang="en-US" dirty="0"/>
               <a:t> 모음</a:t>
             </a:r>
-            <a:endParaRPr lang="en-US" altLang="ko-KR" dirty="0" smtClean="0"/>
+            <a:endParaRPr lang="en-US" altLang="ko-KR" dirty="0"/>
           </a:p>
           <a:p>
             <a:pPr marL="285750" indent="-285750">
@@ -3698,7 +3661,7 @@
               <a:buFontTx/>
               <a:buChar char="-"/>
             </a:pPr>
-            <a:endParaRPr lang="en-US" altLang="ko-KR" dirty="0" smtClean="0"/>
+            <a:endParaRPr lang="en-US" altLang="ko-KR" dirty="0"/>
           </a:p>
           <a:p>
             <a:pPr marL="285750" indent="-285750">
@@ -3706,43 +3669,43 @@
               <a:buChar char="-"/>
             </a:pPr>
             <a:r>
-              <a:rPr lang="ko-KR" altLang="en-US" dirty="0" smtClean="0"/>
+              <a:rPr lang="ko-KR" altLang="en-US" dirty="0"/>
               <a:t>친구목록</a:t>
             </a:r>
             <a:r>
-              <a:rPr lang="en-US" altLang="ko-KR" dirty="0" smtClean="0"/>
+              <a:rPr lang="en-US" altLang="ko-KR" dirty="0"/>
               <a:t>(</a:t>
             </a:r>
             <a:r>
-              <a:rPr lang="ko-KR" altLang="en-US" dirty="0" smtClean="0"/>
+              <a:rPr lang="ko-KR" altLang="en-US" dirty="0"/>
               <a:t>일종의 </a:t>
             </a:r>
             <a:r>
-              <a:rPr lang="ko-KR" altLang="en-US" dirty="0" err="1" smtClean="0"/>
+              <a:rPr lang="ko-KR" altLang="en-US" dirty="0" err="1"/>
               <a:t>팔로우</a:t>
             </a:r>
             <a:r>
-              <a:rPr lang="en-US" altLang="ko-KR" dirty="0" smtClean="0"/>
+              <a:rPr lang="en-US" altLang="ko-KR" dirty="0"/>
               <a:t>, </a:t>
             </a:r>
             <a:r>
-              <a:rPr lang="ko-KR" altLang="en-US" dirty="0" err="1" smtClean="0"/>
+              <a:rPr lang="ko-KR" altLang="en-US" dirty="0" err="1"/>
               <a:t>피드에서</a:t>
             </a:r>
             <a:r>
-              <a:rPr lang="ko-KR" altLang="en-US" dirty="0" smtClean="0"/>
+              <a:rPr lang="ko-KR" altLang="en-US" dirty="0"/>
               <a:t> </a:t>
             </a:r>
             <a:r>
-              <a:rPr lang="ko-KR" altLang="en-US" dirty="0" err="1" smtClean="0"/>
+              <a:rPr lang="ko-KR" altLang="en-US" dirty="0" err="1"/>
               <a:t>후기글</a:t>
             </a:r>
             <a:r>
-              <a:rPr lang="ko-KR" altLang="en-US" dirty="0" smtClean="0"/>
+              <a:rPr lang="ko-KR" altLang="en-US" dirty="0"/>
               <a:t> 확인</a:t>
             </a:r>
             <a:r>
-              <a:rPr lang="en-US" altLang="ko-KR" dirty="0" smtClean="0"/>
+              <a:rPr lang="en-US" altLang="ko-KR" dirty="0"/>
               <a:t>)</a:t>
             </a:r>
             <a:endParaRPr lang="ko-KR" altLang="en-US" dirty="0"/>
@@ -4008,7 +3971,7 @@
           <a:p>
             <a:pPr algn="ctr"/>
             <a:r>
-              <a:rPr lang="en-US" altLang="ko-KR" dirty="0" smtClean="0"/>
+              <a:rPr lang="en-US" altLang="ko-KR" dirty="0"/>
               <a:t>&lt;Review&gt;</a:t>
             </a:r>
           </a:p>
@@ -4055,7 +4018,7 @@
           <a:p>
             <a:pPr algn="ctr"/>
             <a:r>
-              <a:rPr lang="en-US" altLang="ko-KR" dirty="0" smtClean="0"/>
+              <a:rPr lang="en-US" altLang="ko-KR" dirty="0"/>
               <a:t>&lt;User&gt;</a:t>
             </a:r>
           </a:p>
@@ -4148,10 +4111,9 @@
           <a:p>
             <a:pPr algn="ctr"/>
             <a:r>
-              <a:rPr lang="ko-KR" altLang="en-US" dirty="0" smtClean="0"/>
+              <a:rPr lang="ko-KR" altLang="en-US" dirty="0"/>
               <a:t>통계 버튼</a:t>
             </a:r>
-            <a:endParaRPr lang="ko-KR" altLang="en-US" dirty="0"/>
           </a:p>
         </p:txBody>
       </p:sp>
@@ -4267,18 +4229,17 @@
           <a:lstStyle/>
           <a:p>
             <a:r>
-              <a:rPr lang="ko-KR" altLang="en-US" dirty="0" smtClean="0"/>
+              <a:rPr lang="ko-KR" altLang="en-US" dirty="0"/>
               <a:t>자신의 </a:t>
             </a:r>
             <a:r>
-              <a:rPr lang="ko-KR" altLang="en-US" dirty="0" err="1" smtClean="0"/>
+              <a:rPr lang="ko-KR" altLang="en-US" dirty="0" err="1"/>
               <a:t>후기글들</a:t>
             </a:r>
             <a:r>
-              <a:rPr lang="ko-KR" altLang="en-US" dirty="0" smtClean="0"/>
+              <a:rPr lang="ko-KR" altLang="en-US" dirty="0"/>
               <a:t> 확인</a:t>
             </a:r>
-            <a:endParaRPr lang="ko-KR" altLang="en-US" dirty="0"/>
           </a:p>
         </p:txBody>
       </p:sp>
@@ -4544,32 +4505,31 @@
           <a:lstStyle/>
           <a:p>
             <a:r>
-              <a:rPr lang="ko-KR" altLang="en-US" dirty="0" err="1" smtClean="0"/>
+              <a:rPr lang="ko-KR" altLang="en-US" dirty="0" err="1"/>
               <a:t>좋아요를</a:t>
             </a:r>
             <a:r>
-              <a:rPr lang="ko-KR" altLang="en-US" dirty="0" smtClean="0"/>
+              <a:rPr lang="ko-KR" altLang="en-US" dirty="0"/>
               <a:t> 선택했던 공고들을 표시</a:t>
             </a:r>
-            <a:endParaRPr lang="en-US" altLang="ko-KR" dirty="0" smtClean="0"/>
-          </a:p>
-          <a:p>
             <a:endParaRPr lang="en-US" altLang="ko-KR" dirty="0"/>
           </a:p>
           <a:p>
-            <a:r>
-              <a:rPr lang="ko-KR" altLang="en-US" dirty="0" smtClean="0"/>
+            <a:endParaRPr lang="en-US" altLang="ko-KR" dirty="0"/>
+          </a:p>
+          <a:p>
+            <a:r>
+              <a:rPr lang="ko-KR" altLang="en-US" dirty="0"/>
               <a:t>여기서 골라서 </a:t>
             </a:r>
             <a:r>
-              <a:rPr lang="ko-KR" altLang="en-US" dirty="0" err="1" smtClean="0"/>
+              <a:rPr lang="ko-KR" altLang="en-US" dirty="0" err="1"/>
               <a:t>상세보기로</a:t>
             </a:r>
             <a:r>
-              <a:rPr lang="ko-KR" altLang="en-US" dirty="0" smtClean="0"/>
+              <a:rPr lang="ko-KR" altLang="en-US" dirty="0"/>
               <a:t> 신청 가능</a:t>
             </a:r>
-            <a:endParaRPr lang="ko-KR" altLang="en-US" dirty="0"/>
           </a:p>
         </p:txBody>
       </p:sp>
@@ -4596,30 +4556,29 @@
           <a:lstStyle/>
           <a:p>
             <a:r>
-              <a:rPr lang="en-US" altLang="ko-KR" dirty="0" smtClean="0"/>
+              <a:rPr lang="en-US" altLang="ko-KR" dirty="0"/>
               <a:t>*</a:t>
             </a:r>
             <a:r>
-              <a:rPr lang="ko-KR" altLang="en-US" dirty="0" smtClean="0"/>
+              <a:rPr lang="ko-KR" altLang="en-US" dirty="0"/>
               <a:t>이 페이지는 향후 다른 사용자 페이지에 </a:t>
             </a:r>
             <a:r>
-              <a:rPr lang="ko-KR" altLang="en-US" dirty="0" err="1" smtClean="0"/>
+              <a:rPr lang="ko-KR" altLang="en-US" dirty="0" err="1"/>
               <a:t>갔을때</a:t>
             </a:r>
             <a:r>
-              <a:rPr lang="en-US" altLang="ko-KR" dirty="0" smtClean="0"/>
+              <a:rPr lang="en-US" altLang="ko-KR" dirty="0"/>
               <a:t>, </a:t>
             </a:r>
             <a:r>
-              <a:rPr lang="en-US" altLang="ko-KR" dirty="0" err="1" smtClean="0"/>
+              <a:rPr lang="en-US" altLang="ko-KR" dirty="0" err="1"/>
               <a:t>userID</a:t>
             </a:r>
             <a:r>
-              <a:rPr lang="ko-KR" altLang="en-US" dirty="0" smtClean="0"/>
+              <a:rPr lang="ko-KR" altLang="en-US" dirty="0"/>
               <a:t>만 바꿔서 대체 가능</a:t>
             </a:r>
-            <a:endParaRPr lang="ko-KR" altLang="en-US" dirty="0"/>
           </a:p>
         </p:txBody>
       </p:sp>
@@ -4633,13 +4592,6 @@
   <p:clrMapOvr>
     <a:masterClrMapping/>
   </p:clrMapOvr>
-  <p:timing>
-    <p:tnLst>
-      <p:par>
-        <p:cTn id="1" dur="indefinite" restart="never" nodeType="tmRoot"/>
-      </p:par>
-    </p:tnLst>
-  </p:timing>
 </p:sld>
 </file>
 
@@ -4728,19 +4680,19 @@
           <a:lstStyle/>
           <a:p>
             <a:r>
-              <a:rPr lang="en-US" altLang="ko-KR" dirty="0" err="1" smtClean="0"/>
+              <a:rPr lang="en-US" altLang="ko-KR" dirty="0" err="1"/>
               <a:t>Login.tsx</a:t>
             </a:r>
             <a:r>
-              <a:rPr lang="en-US" altLang="ko-KR" dirty="0" smtClean="0"/>
+              <a:rPr lang="en-US" altLang="ko-KR" dirty="0"/>
               <a:t>(</a:t>
             </a:r>
             <a:r>
-              <a:rPr lang="ko-KR" altLang="en-US" dirty="0" smtClean="0"/>
+              <a:rPr lang="ko-KR" altLang="en-US" dirty="0"/>
               <a:t>및 기타 회원 페이지</a:t>
             </a:r>
             <a:r>
-              <a:rPr lang="en-US" altLang="ko-KR" dirty="0" smtClean="0"/>
+              <a:rPr lang="en-US" altLang="ko-KR" dirty="0"/>
               <a:t>)</a:t>
             </a:r>
             <a:endParaRPr lang="ko-KR" altLang="en-US" dirty="0"/>
@@ -4774,10 +4726,10 @@
               <a:buChar char="-"/>
             </a:pPr>
             <a:r>
-              <a:rPr lang="ko-KR" altLang="en-US" dirty="0" smtClean="0"/>
+              <a:rPr lang="ko-KR" altLang="en-US" dirty="0"/>
               <a:t>로그인 겸 회원가입</a:t>
             </a:r>
-            <a:endParaRPr lang="en-US" altLang="ko-KR" dirty="0" smtClean="0"/>
+            <a:endParaRPr lang="en-US" altLang="ko-KR" dirty="0"/>
           </a:p>
           <a:p>
             <a:pPr marL="285750" indent="-285750">
@@ -4792,11 +4744,11 @@
               <a:buChar char="-"/>
             </a:pPr>
             <a:r>
-              <a:rPr lang="ko-KR" altLang="en-US" dirty="0" smtClean="0"/>
+              <a:rPr lang="ko-KR" altLang="en-US" dirty="0"/>
               <a:t>사용자 객체의 정규화를 위해</a:t>
             </a:r>
             <a:r>
-              <a:rPr lang="en-US" altLang="ko-KR" dirty="0" smtClean="0"/>
+              <a:rPr lang="en-US" altLang="ko-KR" dirty="0"/>
               <a:t>, </a:t>
             </a:r>
           </a:p>
@@ -4806,7 +4758,7 @@
               <a:buChar char="-"/>
             </a:pPr>
             <a:r>
-              <a:rPr lang="ko-KR" altLang="en-US" dirty="0" smtClean="0"/>
+              <a:rPr lang="ko-KR" altLang="en-US" dirty="0"/>
               <a:t>가입시 필요한 정보 입력하게 요청</a:t>
             </a:r>
           </a:p>
@@ -4823,18 +4775,18 @@
               <a:buChar char="-"/>
             </a:pPr>
             <a:r>
-              <a:rPr lang="ko-KR" altLang="en-US" dirty="0" smtClean="0"/>
+              <a:rPr lang="ko-KR" altLang="en-US" dirty="0"/>
               <a:t>초기 가입시</a:t>
             </a:r>
             <a:r>
-              <a:rPr lang="en-US" altLang="ko-KR" dirty="0" smtClean="0"/>
+              <a:rPr lang="en-US" altLang="ko-KR" dirty="0"/>
               <a:t>, </a:t>
             </a:r>
             <a:r>
-              <a:rPr lang="ko-KR" altLang="en-US" dirty="0" smtClean="0"/>
+              <a:rPr lang="ko-KR" altLang="en-US" dirty="0"/>
               <a:t>공고 몇 개 예시로 보여주고 사용자 선택을 통해 초기 알고리즘 데이터 확보</a:t>
             </a:r>
-            <a:endParaRPr lang="en-US" altLang="ko-KR" dirty="0" smtClean="0"/>
+            <a:endParaRPr lang="en-US" altLang="ko-KR" dirty="0"/>
           </a:p>
         </p:txBody>
       </p:sp>
@@ -5058,7 +5010,7 @@
           <a:p>
             <a:pPr algn="ctr"/>
             <a:r>
-              <a:rPr lang="en-US" altLang="ko-KR" dirty="0" smtClean="0"/>
+              <a:rPr lang="en-US" altLang="ko-KR" dirty="0"/>
               <a:t>&lt;User&gt;</a:t>
             </a:r>
           </a:p>
@@ -5102,13 +5054,6 @@
   <p:clrMapOvr>
     <a:masterClrMapping/>
   </p:clrMapOvr>
-  <p:timing>
-    <p:tnLst>
-      <p:par>
-        <p:cTn id="1" dur="indefinite" restart="never" nodeType="tmRoot"/>
-      </p:par>
-    </p:tnLst>
-  </p:timing>
 </p:sld>
 </file>
 
@@ -5221,7 +5166,7 @@
           <a:lstStyle/>
           <a:p>
             <a:r>
-              <a:rPr lang="en-US" altLang="ko-KR" dirty="0" err="1" smtClean="0"/>
+              <a:rPr lang="en-US" altLang="ko-KR" dirty="0" err="1"/>
               <a:t>Statistic.tsx</a:t>
             </a:r>
             <a:endParaRPr lang="ko-KR" altLang="en-US" dirty="0"/>
@@ -5255,14 +5200,14 @@
               <a:buChar char="-"/>
             </a:pPr>
             <a:r>
-              <a:rPr lang="en-US" altLang="ko-KR" dirty="0" smtClean="0"/>
+              <a:rPr lang="en-US" altLang="ko-KR" dirty="0"/>
               <a:t>AI</a:t>
             </a:r>
             <a:r>
-              <a:rPr lang="ko-KR" altLang="en-US" dirty="0" smtClean="0"/>
+              <a:rPr lang="ko-KR" altLang="en-US" dirty="0"/>
               <a:t>가 가지고 있는 해당 사용자 정보</a:t>
             </a:r>
-            <a:endParaRPr lang="en-US" altLang="ko-KR" dirty="0" smtClean="0"/>
+            <a:endParaRPr lang="en-US" altLang="ko-KR" dirty="0"/>
           </a:p>
           <a:p>
             <a:pPr marL="285750" indent="-285750">
@@ -5277,19 +5222,19 @@
               <a:buChar char="-"/>
             </a:pPr>
             <a:r>
-              <a:rPr lang="ko-KR" altLang="en-US" dirty="0" smtClean="0"/>
+              <a:rPr lang="ko-KR" altLang="en-US" dirty="0"/>
               <a:t>그동안 봉사 정보에 대한 통계</a:t>
             </a:r>
             <a:r>
-              <a:rPr lang="en-US" altLang="ko-KR" dirty="0" smtClean="0"/>
+              <a:rPr lang="en-US" altLang="ko-KR" dirty="0"/>
               <a:t>(</a:t>
             </a:r>
             <a:r>
-              <a:rPr lang="ko-KR" altLang="en-US" dirty="0" smtClean="0"/>
+              <a:rPr lang="ko-KR" altLang="en-US" dirty="0"/>
               <a:t>다른 사용자 평균과 비교</a:t>
             </a:r>
             <a:r>
-              <a:rPr lang="en-US" altLang="ko-KR" dirty="0" smtClean="0"/>
+              <a:rPr lang="en-US" altLang="ko-KR" dirty="0"/>
               <a:t>)</a:t>
             </a:r>
           </a:p>
@@ -5306,10 +5251,10 @@
               <a:buChar char="-"/>
             </a:pPr>
             <a:r>
-              <a:rPr lang="ko-KR" altLang="en-US" dirty="0" smtClean="0"/>
+              <a:rPr lang="ko-KR" altLang="en-US" dirty="0"/>
               <a:t>어떤 알고리즘으로 작동하는지 설명</a:t>
             </a:r>
-            <a:endParaRPr lang="en-US" altLang="ko-KR" dirty="0" smtClean="0"/>
+            <a:endParaRPr lang="en-US" altLang="ko-KR" dirty="0"/>
           </a:p>
           <a:p>
             <a:pPr marL="285750" indent="-285750">
@@ -5324,18 +5269,18 @@
               <a:buChar char="-"/>
             </a:pPr>
             <a:r>
-              <a:rPr lang="ko-KR" altLang="en-US" dirty="0" smtClean="0"/>
+              <a:rPr lang="ko-KR" altLang="en-US" dirty="0"/>
               <a:t>버튼 </a:t>
             </a:r>
             <a:r>
-              <a:rPr lang="ko-KR" altLang="en-US" dirty="0" err="1" smtClean="0"/>
+              <a:rPr lang="ko-KR" altLang="en-US" dirty="0" err="1"/>
               <a:t>클릭시</a:t>
             </a:r>
             <a:r>
-              <a:rPr lang="ko-KR" altLang="en-US" dirty="0" smtClean="0"/>
+              <a:rPr lang="ko-KR" altLang="en-US" dirty="0"/>
               <a:t> 알고리즘 초기화</a:t>
             </a:r>
-            <a:endParaRPr lang="en-US" altLang="ko-KR" dirty="0" smtClean="0"/>
+            <a:endParaRPr lang="en-US" altLang="ko-KR" dirty="0"/>
           </a:p>
         </p:txBody>
       </p:sp>
@@ -5562,18 +5507,17 @@
           <a:p>
             <a:pPr algn="ctr"/>
             <a:r>
-              <a:rPr lang="ko-KR" altLang="en-US" sz="1200" b="1" dirty="0" smtClean="0"/>
+              <a:rPr lang="ko-KR" altLang="en-US" sz="1200" b="1" dirty="0"/>
               <a:t>알고리즘 </a:t>
             </a:r>
-            <a:endParaRPr lang="en-US" altLang="ko-KR" sz="1200" b="1" dirty="0" smtClean="0"/>
+            <a:endParaRPr lang="en-US" altLang="ko-KR" sz="1200" b="1" dirty="0"/>
           </a:p>
           <a:p>
             <a:pPr algn="ctr"/>
             <a:r>
-              <a:rPr lang="ko-KR" altLang="en-US" sz="1200" b="1" dirty="0" smtClean="0"/>
+              <a:rPr lang="ko-KR" altLang="en-US" sz="1200" b="1" dirty="0"/>
               <a:t>초기화 버튼</a:t>
             </a:r>
-            <a:endParaRPr lang="ko-KR" altLang="en-US" sz="1200" b="1" dirty="0"/>
           </a:p>
         </p:txBody>
       </p:sp>
@@ -5614,7 +5558,7 @@
           <a:p>
             <a:pPr algn="ctr"/>
             <a:r>
-              <a:rPr lang="en-US" altLang="ko-KR" dirty="0" smtClean="0"/>
+              <a:rPr lang="en-US" altLang="ko-KR" dirty="0"/>
               <a:t>&lt;User&gt;</a:t>
             </a:r>
           </a:p>
@@ -5634,13 +5578,6 @@
   <p:clrMapOvr>
     <a:masterClrMapping/>
   </p:clrMapOvr>
-  <p:timing>
-    <p:tnLst>
-      <p:par>
-        <p:cTn id="1" dur="indefinite" restart="never" nodeType="tmRoot"/>
-      </p:par>
-    </p:tnLst>
-  </p:timing>
 </p:sld>
 </file>
 
@@ -6339,13 +6276,6 @@
   <p:clrMapOvr>
     <a:masterClrMapping/>
   </p:clrMapOvr>
-  <p:timing>
-    <p:tnLst>
-      <p:par>
-        <p:cTn id="1" dur="indefinite" restart="never" nodeType="tmRoot"/>
-      </p:par>
-    </p:tnLst>
-  </p:timing>
 </p:sld>
 </file>
 
@@ -6382,15 +6312,15 @@
           <a:lstStyle/>
           <a:p>
             <a:r>
-              <a:rPr lang="en-US" altLang="ko-KR" dirty="0" smtClean="0"/>
+              <a:rPr lang="en-US" altLang="ko-KR" dirty="0"/>
               <a:t>DTO(</a:t>
             </a:r>
             <a:r>
-              <a:rPr lang="ko-KR" altLang="en-US" dirty="0" smtClean="0"/>
+              <a:rPr lang="ko-KR" altLang="en-US" dirty="0"/>
               <a:t>객체</a:t>
             </a:r>
             <a:r>
-              <a:rPr lang="en-US" altLang="ko-KR" dirty="0" smtClean="0"/>
+              <a:rPr lang="en-US" altLang="ko-KR" dirty="0"/>
               <a:t>) &amp; ERD</a:t>
             </a:r>
             <a:endParaRPr lang="ko-KR" altLang="en-US" dirty="0"/>
@@ -6434,7 +6364,7 @@
           <a:p>
             <a:pPr algn="ctr"/>
             <a:r>
-              <a:rPr lang="en-US" altLang="ko-KR" dirty="0" smtClean="0"/>
+              <a:rPr lang="en-US" altLang="ko-KR" dirty="0"/>
               <a:t>&lt;User&gt;</a:t>
             </a:r>
           </a:p>
@@ -6481,7 +6411,7 @@
           <a:p>
             <a:pPr algn="ctr"/>
             <a:r>
-              <a:rPr lang="en-US" altLang="ko-KR" dirty="0" smtClean="0"/>
+              <a:rPr lang="en-US" altLang="ko-KR" dirty="0"/>
               <a:t>&lt;Review&gt;</a:t>
             </a:r>
           </a:p>
@@ -6528,7 +6458,7 @@
           <a:p>
             <a:pPr algn="ctr"/>
             <a:r>
-              <a:rPr lang="en-US" altLang="ko-KR" dirty="0" smtClean="0"/>
+              <a:rPr lang="en-US" altLang="ko-KR" dirty="0"/>
               <a:t>&lt;Bong&gt;</a:t>
             </a:r>
           </a:p>
@@ -6548,13 +6478,6 @@
   <p:clrMapOvr>
     <a:masterClrMapping/>
   </p:clrMapOvr>
-  <p:timing>
-    <p:tnLst>
-      <p:par>
-        <p:cTn id="1" dur="indefinite" restart="never" nodeType="tmRoot"/>
-      </p:par>
-    </p:tnLst>
-  </p:timing>
 </p:sld>
 </file>
 
@@ -6591,18 +6514,17 @@
           <a:lstStyle/>
           <a:p>
             <a:r>
-              <a:rPr lang="ko-KR" altLang="en-US" dirty="0" smtClean="0"/>
+              <a:rPr lang="ko-KR" altLang="en-US" dirty="0"/>
               <a:t>추천 </a:t>
             </a:r>
             <a:r>
-              <a:rPr lang="en-US" altLang="ko-KR" dirty="0" smtClean="0"/>
+              <a:rPr lang="en-US" altLang="ko-KR" dirty="0"/>
               <a:t>AI </a:t>
             </a:r>
             <a:r>
-              <a:rPr lang="ko-KR" altLang="en-US" dirty="0" smtClean="0"/>
+              <a:rPr lang="ko-KR" altLang="en-US" dirty="0"/>
               <a:t>설계</a:t>
             </a:r>
-            <a:endParaRPr lang="ko-KR" altLang="en-US" dirty="0"/>
           </a:p>
         </p:txBody>
       </p:sp>
@@ -6629,15 +6551,15 @@
           <a:lstStyle/>
           <a:p>
             <a:r>
-              <a:rPr lang="en-US" altLang="ko-KR" dirty="0" smtClean="0"/>
+              <a:rPr lang="en-US" altLang="ko-KR" dirty="0"/>
               <a:t>&lt;</a:t>
             </a:r>
             <a:r>
-              <a:rPr lang="ko-KR" altLang="en-US" dirty="0" smtClean="0"/>
+              <a:rPr lang="ko-KR" altLang="en-US" dirty="0"/>
               <a:t>데이터</a:t>
             </a:r>
             <a:r>
-              <a:rPr lang="en-US" altLang="ko-KR" dirty="0" smtClean="0"/>
+              <a:rPr lang="en-US" altLang="ko-KR" dirty="0"/>
               <a:t>&gt;</a:t>
             </a:r>
           </a:p>
@@ -6647,18 +6569,18 @@
               <a:buChar char="-"/>
             </a:pPr>
             <a:r>
-              <a:rPr lang="ko-KR" altLang="en-US" dirty="0" smtClean="0"/>
+              <a:rPr lang="ko-KR" altLang="en-US" dirty="0"/>
               <a:t>최초 </a:t>
             </a:r>
             <a:r>
-              <a:rPr lang="ko-KR" altLang="en-US" dirty="0" err="1" smtClean="0"/>
+              <a:rPr lang="ko-KR" altLang="en-US" dirty="0" err="1"/>
               <a:t>회원가입시</a:t>
             </a:r>
             <a:r>
-              <a:rPr lang="ko-KR" altLang="en-US" dirty="0" smtClean="0"/>
+              <a:rPr lang="ko-KR" altLang="en-US" dirty="0"/>
               <a:t> 예시로 보여주는 공고 선택 내용</a:t>
             </a:r>
-            <a:endParaRPr lang="en-US" altLang="ko-KR" dirty="0" smtClean="0"/>
+            <a:endParaRPr lang="en-US" altLang="ko-KR" dirty="0"/>
           </a:p>
           <a:p>
             <a:pPr marL="285750" indent="-285750">
@@ -6666,18 +6588,18 @@
               <a:buChar char="-"/>
             </a:pPr>
             <a:r>
-              <a:rPr lang="ko-KR" altLang="en-US" dirty="0" smtClean="0"/>
+              <a:rPr lang="ko-KR" altLang="en-US" dirty="0"/>
               <a:t>공고에서 좋아요</a:t>
             </a:r>
             <a:r>
-              <a:rPr lang="en-US" altLang="ko-KR" dirty="0" smtClean="0"/>
+              <a:rPr lang="en-US" altLang="ko-KR" dirty="0"/>
               <a:t>/</a:t>
             </a:r>
             <a:r>
-              <a:rPr lang="ko-KR" altLang="en-US" dirty="0" smtClean="0"/>
+              <a:rPr lang="ko-KR" altLang="en-US" dirty="0"/>
               <a:t>싫어요 현황</a:t>
             </a:r>
-            <a:endParaRPr lang="en-US" altLang="ko-KR" dirty="0" smtClean="0"/>
+            <a:endParaRPr lang="en-US" altLang="ko-KR" dirty="0"/>
           </a:p>
           <a:p>
             <a:pPr marL="285750" indent="-285750">
@@ -6685,23 +6607,23 @@
               <a:buChar char="-"/>
             </a:pPr>
             <a:r>
-              <a:rPr lang="ko-KR" altLang="en-US" dirty="0" smtClean="0"/>
+              <a:rPr lang="ko-KR" altLang="en-US" dirty="0"/>
               <a:t>상세보기에서 신청을 했던 내역</a:t>
             </a:r>
             <a:r>
-              <a:rPr lang="en-US" altLang="ko-KR" dirty="0" smtClean="0"/>
+              <a:rPr lang="en-US" altLang="ko-KR" dirty="0"/>
               <a:t>(</a:t>
             </a:r>
             <a:r>
-              <a:rPr lang="ko-KR" altLang="en-US" dirty="0" err="1" smtClean="0"/>
+              <a:rPr lang="ko-KR" altLang="en-US" dirty="0" err="1"/>
               <a:t>후기글</a:t>
             </a:r>
             <a:r>
-              <a:rPr lang="ko-KR" altLang="en-US" dirty="0" smtClean="0"/>
+              <a:rPr lang="ko-KR" altLang="en-US" dirty="0"/>
               <a:t> 작성도 감안</a:t>
             </a:r>
             <a:r>
-              <a:rPr lang="en-US" altLang="ko-KR" dirty="0" smtClean="0"/>
+              <a:rPr lang="en-US" altLang="ko-KR" dirty="0"/>
               <a:t>)</a:t>
             </a:r>
           </a:p>
@@ -6711,22 +6633,22 @@
               <a:buChar char="-"/>
             </a:pPr>
             <a:r>
-              <a:rPr lang="ko-KR" altLang="en-US" dirty="0" err="1" smtClean="0"/>
+              <a:rPr lang="ko-KR" altLang="en-US" dirty="0" err="1"/>
               <a:t>피드에서</a:t>
             </a:r>
             <a:r>
-              <a:rPr lang="ko-KR" altLang="en-US" dirty="0" smtClean="0"/>
+              <a:rPr lang="ko-KR" altLang="en-US" dirty="0"/>
               <a:t> 주로 클릭했던 </a:t>
             </a:r>
             <a:r>
-              <a:rPr lang="ko-KR" altLang="en-US" dirty="0" err="1" smtClean="0"/>
+              <a:rPr lang="ko-KR" altLang="en-US" dirty="0" err="1"/>
               <a:t>후기글과</a:t>
             </a:r>
             <a:r>
-              <a:rPr lang="ko-KR" altLang="en-US" dirty="0" smtClean="0"/>
+              <a:rPr lang="ko-KR" altLang="en-US" dirty="0"/>
               <a:t> 연관된 공고</a:t>
             </a:r>
-            <a:endParaRPr lang="en-US" altLang="ko-KR" dirty="0" smtClean="0"/>
+            <a:endParaRPr lang="en-US" altLang="ko-KR" dirty="0"/>
           </a:p>
           <a:p>
             <a:pPr marL="285750" indent="-285750">
@@ -6737,15 +6659,15 @@
           </a:p>
           <a:p>
             <a:r>
-              <a:rPr lang="en-US" altLang="ko-KR" dirty="0" smtClean="0"/>
+              <a:rPr lang="en-US" altLang="ko-KR" dirty="0"/>
               <a:t>&lt;</a:t>
             </a:r>
             <a:r>
-              <a:rPr lang="ko-KR" altLang="en-US" dirty="0" smtClean="0"/>
+              <a:rPr lang="ko-KR" altLang="en-US" dirty="0"/>
               <a:t>활용</a:t>
             </a:r>
             <a:r>
-              <a:rPr lang="en-US" altLang="ko-KR" dirty="0" smtClean="0"/>
+              <a:rPr lang="en-US" altLang="ko-KR" dirty="0"/>
               <a:t>&gt;</a:t>
             </a:r>
           </a:p>
@@ -6754,44 +6676,44 @@
               <a:buAutoNum type="arabicPeriod"/>
             </a:pPr>
             <a:r>
-              <a:rPr lang="ko-KR" altLang="en-US" dirty="0" smtClean="0"/>
+              <a:rPr lang="ko-KR" altLang="en-US" dirty="0"/>
               <a:t>슬라이더에 표시되는 공고에 반영</a:t>
             </a:r>
-            <a:endParaRPr lang="en-US" altLang="ko-KR" dirty="0" smtClean="0"/>
+            <a:endParaRPr lang="en-US" altLang="ko-KR" dirty="0"/>
           </a:p>
           <a:p>
             <a:pPr marL="342900" indent="-342900">
               <a:buAutoNum type="arabicPeriod"/>
             </a:pPr>
             <a:r>
-              <a:rPr lang="ko-KR" altLang="en-US" dirty="0" err="1" smtClean="0"/>
+              <a:rPr lang="ko-KR" altLang="en-US" dirty="0" err="1"/>
               <a:t>피드에</a:t>
             </a:r>
             <a:r>
-              <a:rPr lang="ko-KR" altLang="en-US" dirty="0" smtClean="0"/>
+              <a:rPr lang="ko-KR" altLang="en-US" dirty="0"/>
               <a:t> 표시되는 </a:t>
             </a:r>
             <a:r>
-              <a:rPr lang="ko-KR" altLang="en-US" dirty="0" err="1" smtClean="0"/>
+              <a:rPr lang="ko-KR" altLang="en-US" dirty="0" err="1"/>
               <a:t>후기글</a:t>
             </a:r>
             <a:r>
-              <a:rPr lang="en-US" altLang="ko-KR" dirty="0" smtClean="0"/>
+              <a:rPr lang="en-US" altLang="ko-KR" dirty="0"/>
               <a:t>(</a:t>
             </a:r>
             <a:r>
-              <a:rPr lang="ko-KR" altLang="en-US" dirty="0" smtClean="0"/>
+              <a:rPr lang="ko-KR" altLang="en-US" dirty="0"/>
               <a:t>공고 관련</a:t>
             </a:r>
             <a:r>
-              <a:rPr lang="en-US" altLang="ko-KR" dirty="0" smtClean="0"/>
+              <a:rPr lang="en-US" altLang="ko-KR" dirty="0"/>
               <a:t>)</a:t>
             </a:r>
             <a:r>
-              <a:rPr lang="ko-KR" altLang="en-US" dirty="0" smtClean="0"/>
+              <a:rPr lang="ko-KR" altLang="en-US" dirty="0"/>
               <a:t>에 반영</a:t>
             </a:r>
-            <a:endParaRPr lang="en-US" altLang="ko-KR" dirty="0" smtClean="0"/>
+            <a:endParaRPr lang="en-US" altLang="ko-KR" dirty="0"/>
           </a:p>
           <a:p>
             <a:pPr marL="342900" indent="-342900">
@@ -6803,44 +6725,44 @@
             <a:pPr marL="342900" indent="-342900">
               <a:buAutoNum type="arabicPeriod"/>
             </a:pPr>
-            <a:endParaRPr lang="en-US" altLang="ko-KR" dirty="0" smtClean="0"/>
-          </a:p>
-          <a:p>
-            <a:r>
-              <a:rPr lang="en-US" altLang="ko-KR" dirty="0" smtClean="0"/>
+            <a:endParaRPr lang="en-US" altLang="ko-KR" dirty="0"/>
+          </a:p>
+          <a:p>
+            <a:r>
+              <a:rPr lang="en-US" altLang="ko-KR" dirty="0"/>
               <a:t>&lt;</a:t>
             </a:r>
             <a:r>
-              <a:rPr lang="ko-KR" altLang="en-US" dirty="0" smtClean="0"/>
+              <a:rPr lang="ko-KR" altLang="en-US" dirty="0"/>
               <a:t>객체</a:t>
             </a:r>
             <a:r>
-              <a:rPr lang="en-US" altLang="ko-KR" dirty="0" smtClean="0"/>
+              <a:rPr lang="en-US" altLang="ko-KR" dirty="0"/>
               <a:t>-</a:t>
             </a:r>
             <a:r>
-              <a:rPr lang="ko-KR" altLang="en-US" dirty="0" smtClean="0"/>
+              <a:rPr lang="ko-KR" altLang="en-US" dirty="0"/>
               <a:t>객체 예측</a:t>
             </a:r>
             <a:r>
-              <a:rPr lang="en-US" altLang="ko-KR" dirty="0" smtClean="0"/>
+              <a:rPr lang="en-US" altLang="ko-KR" dirty="0"/>
               <a:t>&gt;</a:t>
             </a:r>
           </a:p>
           <a:p>
             <a:r>
-              <a:rPr lang="ko-KR" altLang="en-US" dirty="0" smtClean="0"/>
+              <a:rPr lang="ko-KR" altLang="en-US" dirty="0"/>
               <a:t>사용자 객체 </a:t>
             </a:r>
             <a:r>
-              <a:rPr lang="en-US" altLang="ko-KR" dirty="0" smtClean="0"/>
+              <a:rPr lang="en-US" altLang="ko-KR" dirty="0"/>
               <a:t>– </a:t>
             </a:r>
             <a:r>
-              <a:rPr lang="ko-KR" altLang="en-US" dirty="0" smtClean="0"/>
+              <a:rPr lang="ko-KR" altLang="en-US" dirty="0"/>
               <a:t>공고 객체</a:t>
             </a:r>
-            <a:endParaRPr lang="en-US" altLang="ko-KR" dirty="0" smtClean="0"/>
+            <a:endParaRPr lang="en-US" altLang="ko-KR" dirty="0"/>
           </a:p>
         </p:txBody>
       </p:sp>
@@ -6881,14 +6803,14 @@
           <a:p>
             <a:pPr algn="ctr"/>
             <a:r>
-              <a:rPr lang="ko-KR" altLang="en-US" dirty="0" smtClean="0"/>
+              <a:rPr lang="ko-KR" altLang="en-US" dirty="0"/>
               <a:t>일단 빅데이터로 알고리즘 형식으로 </a:t>
             </a:r>
             <a:r>
-              <a:rPr lang="ko-KR" altLang="en-US" dirty="0" err="1" smtClean="0"/>
+              <a:rPr lang="ko-KR" altLang="en-US" dirty="0" err="1"/>
               <a:t>갈껀데</a:t>
             </a:r>
-            <a:endParaRPr lang="en-US" altLang="ko-KR" dirty="0" smtClean="0"/>
+            <a:endParaRPr lang="en-US" altLang="ko-KR" dirty="0"/>
           </a:p>
           <a:p>
             <a:pPr algn="ctr"/>
@@ -6897,11 +6819,11 @@
           <a:p>
             <a:pPr algn="ctr"/>
             <a:r>
-              <a:rPr lang="ko-KR" altLang="en-US" dirty="0" smtClean="0"/>
+              <a:rPr lang="ko-KR" altLang="en-US" dirty="0"/>
               <a:t>가능하다면 모델 활용</a:t>
             </a:r>
             <a:r>
-              <a:rPr lang="en-US" altLang="ko-KR" dirty="0" smtClean="0"/>
+              <a:rPr lang="en-US" altLang="ko-KR" dirty="0"/>
               <a:t>!!!</a:t>
             </a:r>
           </a:p>
@@ -6912,34 +6834,34 @@
           <a:p>
             <a:pPr algn="ctr"/>
             <a:r>
-              <a:rPr lang="en-US" altLang="ko-KR" b="1" dirty="0" smtClean="0"/>
+              <a:rPr lang="en-US" altLang="ko-KR" b="1" dirty="0"/>
               <a:t>*</a:t>
             </a:r>
             <a:r>
-              <a:rPr lang="ko-KR" altLang="en-US" b="1" dirty="0" smtClean="0"/>
+              <a:rPr lang="ko-KR" altLang="en-US" b="1" dirty="0"/>
               <a:t>모델 </a:t>
             </a:r>
             <a:r>
-              <a:rPr lang="ko-KR" altLang="en-US" b="1" dirty="0" err="1" smtClean="0"/>
+              <a:rPr lang="ko-KR" altLang="en-US" b="1" dirty="0" err="1"/>
               <a:t>활용시</a:t>
             </a:r>
             <a:r>
-              <a:rPr lang="en-US" altLang="ko-KR" b="1" dirty="0" smtClean="0"/>
+              <a:rPr lang="en-US" altLang="ko-KR" b="1" dirty="0"/>
               <a:t>, </a:t>
             </a:r>
             <a:r>
-              <a:rPr lang="ko-KR" altLang="en-US" b="1" dirty="0" smtClean="0"/>
+              <a:rPr lang="ko-KR" altLang="en-US" b="1" dirty="0"/>
               <a:t>사용자만 입력되면 </a:t>
             </a:r>
             <a:r>
-              <a:rPr lang="ko-KR" altLang="en-US" b="1" dirty="0" err="1" smtClean="0"/>
+              <a:rPr lang="ko-KR" altLang="en-US" b="1" dirty="0" err="1"/>
               <a:t>사전학습</a:t>
             </a:r>
             <a:r>
-              <a:rPr lang="ko-KR" altLang="en-US" b="1" dirty="0" smtClean="0"/>
+              <a:rPr lang="ko-KR" altLang="en-US" b="1" dirty="0"/>
               <a:t> 기반으로 좋아할 공고 예측</a:t>
             </a:r>
-            <a:endParaRPr lang="en-US" altLang="ko-KR" b="1" dirty="0" smtClean="0"/>
+            <a:endParaRPr lang="en-US" altLang="ko-KR" b="1" dirty="0"/>
           </a:p>
           <a:p>
             <a:pPr algn="ctr"/>
@@ -6961,13 +6883,6 @@
   <p:clrMapOvr>
     <a:masterClrMapping/>
   </p:clrMapOvr>
-  <p:timing>
-    <p:tnLst>
-      <p:par>
-        <p:cTn id="1" dur="indefinite" restart="never" nodeType="tmRoot"/>
-      </p:par>
-    </p:tnLst>
-  </p:timing>
 </p:sld>
 </file>
 
@@ -7251,26 +7166,25 @@
           <a:lstStyle/>
           <a:p>
             <a:r>
-              <a:rPr lang="ko-KR" altLang="en-US" dirty="0" smtClean="0"/>
+              <a:rPr lang="ko-KR" altLang="en-US" dirty="0"/>
               <a:t>좋아요</a:t>
             </a:r>
             <a:r>
-              <a:rPr lang="en-US" altLang="ko-KR" dirty="0" smtClean="0"/>
+              <a:rPr lang="en-US" altLang="ko-KR" dirty="0"/>
               <a:t>/</a:t>
             </a:r>
             <a:r>
-              <a:rPr lang="ko-KR" altLang="en-US" dirty="0" smtClean="0"/>
+              <a:rPr lang="ko-KR" altLang="en-US" dirty="0"/>
               <a:t>싫어요</a:t>
             </a:r>
             <a:r>
-              <a:rPr lang="en-US" altLang="ko-KR" dirty="0" smtClean="0"/>
+              <a:rPr lang="en-US" altLang="ko-KR" dirty="0"/>
               <a:t>/</a:t>
             </a:r>
             <a:r>
-              <a:rPr lang="ko-KR" altLang="en-US" dirty="0" smtClean="0"/>
+              <a:rPr lang="ko-KR" altLang="en-US" dirty="0"/>
               <a:t>상세</a:t>
             </a:r>
-            <a:endParaRPr lang="ko-KR" altLang="en-US" dirty="0"/>
           </a:p>
         </p:txBody>
       </p:sp>
@@ -7297,26 +7211,25 @@
           <a:lstStyle/>
           <a:p>
             <a:r>
-              <a:rPr lang="ko-KR" altLang="en-US" dirty="0" smtClean="0"/>
+              <a:rPr lang="ko-KR" altLang="en-US" dirty="0"/>
               <a:t>좋아요</a:t>
             </a:r>
             <a:r>
-              <a:rPr lang="en-US" altLang="ko-KR" dirty="0" smtClean="0"/>
+              <a:rPr lang="en-US" altLang="ko-KR" dirty="0"/>
               <a:t>/</a:t>
             </a:r>
             <a:r>
-              <a:rPr lang="ko-KR" altLang="en-US" dirty="0" smtClean="0"/>
+              <a:rPr lang="ko-KR" altLang="en-US" dirty="0"/>
               <a:t>싫어요</a:t>
             </a:r>
             <a:r>
-              <a:rPr lang="en-US" altLang="ko-KR" dirty="0" smtClean="0"/>
+              <a:rPr lang="en-US" altLang="ko-KR" dirty="0"/>
               <a:t>/</a:t>
             </a:r>
             <a:r>
-              <a:rPr lang="ko-KR" altLang="en-US" dirty="0" smtClean="0"/>
+              <a:rPr lang="ko-KR" altLang="en-US" dirty="0"/>
               <a:t>상세</a:t>
             </a:r>
-            <a:endParaRPr lang="ko-KR" altLang="en-US" dirty="0"/>
           </a:p>
         </p:txBody>
       </p:sp>
@@ -7357,10 +7270,9 @@
           <a:p>
             <a:pPr algn="ctr"/>
             <a:r>
-              <a:rPr lang="en-US" altLang="ko-KR" dirty="0" smtClean="0"/>
+              <a:rPr lang="en-US" altLang="ko-KR" dirty="0"/>
               <a:t>Review</a:t>
             </a:r>
-            <a:endParaRPr lang="en-US" altLang="ko-KR" dirty="0" smtClean="0"/>
           </a:p>
         </p:txBody>
       </p:sp>
@@ -7401,10 +7313,9 @@
           <a:p>
             <a:pPr algn="ctr"/>
             <a:r>
-              <a:rPr lang="en-US" altLang="ko-KR" dirty="0" smtClean="0"/>
+              <a:rPr lang="en-US" altLang="ko-KR" dirty="0"/>
               <a:t>User</a:t>
             </a:r>
-            <a:endParaRPr lang="en-US" altLang="ko-KR" dirty="0" smtClean="0"/>
           </a:p>
         </p:txBody>
       </p:sp>
@@ -7445,10 +7356,9 @@
           <a:p>
             <a:pPr algn="ctr"/>
             <a:r>
-              <a:rPr lang="en-US" altLang="ko-KR" dirty="0" smtClean="0"/>
+              <a:rPr lang="en-US" altLang="ko-KR" dirty="0"/>
               <a:t>Bong</a:t>
             </a:r>
-            <a:endParaRPr lang="en-US" altLang="ko-KR" dirty="0" smtClean="0"/>
           </a:p>
         </p:txBody>
       </p:sp>
@@ -7559,10 +7469,9 @@
           <a:lstStyle/>
           <a:p>
             <a:r>
-              <a:rPr lang="ko-KR" altLang="en-US" dirty="0" smtClean="0"/>
+              <a:rPr lang="ko-KR" altLang="en-US" dirty="0"/>
               <a:t>검색</a:t>
             </a:r>
-            <a:endParaRPr lang="ko-KR" altLang="en-US" dirty="0"/>
           </a:p>
         </p:txBody>
       </p:sp>
@@ -7603,10 +7512,9 @@
           <a:p>
             <a:pPr algn="ctr"/>
             <a:r>
-              <a:rPr lang="en-US" altLang="ko-KR" dirty="0" smtClean="0"/>
+              <a:rPr lang="en-US" altLang="ko-KR" dirty="0"/>
               <a:t>Review</a:t>
             </a:r>
-            <a:endParaRPr lang="en-US" altLang="ko-KR" dirty="0" smtClean="0"/>
           </a:p>
         </p:txBody>
       </p:sp>
@@ -7647,10 +7555,9 @@
           <a:p>
             <a:pPr algn="ctr"/>
             <a:r>
-              <a:rPr lang="en-US" altLang="ko-KR" dirty="0" smtClean="0"/>
+              <a:rPr lang="en-US" altLang="ko-KR" dirty="0"/>
               <a:t>Bong</a:t>
             </a:r>
-            <a:endParaRPr lang="en-US" altLang="ko-KR" dirty="0" smtClean="0"/>
           </a:p>
         </p:txBody>
       </p:sp>
@@ -7691,10 +7598,9 @@
           <a:p>
             <a:pPr algn="ctr"/>
             <a:r>
-              <a:rPr lang="en-US" altLang="ko-KR" dirty="0" smtClean="0"/>
+              <a:rPr lang="en-US" altLang="ko-KR" dirty="0"/>
               <a:t>User</a:t>
             </a:r>
-            <a:endParaRPr lang="en-US" altLang="ko-KR" dirty="0" smtClean="0"/>
           </a:p>
         </p:txBody>
       </p:sp>
@@ -7852,13 +7758,6 @@
   <p:clrMapOvr>
     <a:masterClrMapping/>
   </p:clrMapOvr>
-  <p:timing>
-    <p:tnLst>
-      <p:par>
-        <p:cTn id="1" dur="indefinite" restart="never" nodeType="tmRoot"/>
-      </p:par>
-    </p:tnLst>
-  </p:timing>
 </p:sld>
 </file>
 
@@ -7895,7 +7794,7 @@
           <a:lstStyle/>
           <a:p>
             <a:r>
-              <a:rPr lang="ko-KR" altLang="en-US" dirty="0" err="1" smtClean="0"/>
+              <a:rPr lang="ko-KR" altLang="en-US" dirty="0" err="1"/>
               <a:t>핵심주제</a:t>
             </a:r>
             <a:endParaRPr lang="ko-KR" altLang="en-US" dirty="0"/>
@@ -7918,57 +7817,272 @@
           <a:lstStyle/>
           <a:p>
             <a:r>
-              <a:rPr lang="en-US" altLang="ko-KR" dirty="0" smtClean="0"/>
+              <a:rPr lang="en-US" altLang="ko-KR" dirty="0"/>
               <a:t>1. </a:t>
             </a:r>
             <a:r>
-              <a:rPr lang="ko-KR" altLang="en-US" dirty="0" smtClean="0"/>
+              <a:rPr lang="ko-KR" altLang="en-US" dirty="0"/>
               <a:t>다양한 봉사 공고를 </a:t>
             </a:r>
             <a:r>
-              <a:rPr lang="en-US" altLang="ko-KR" dirty="0" smtClean="0"/>
+              <a:rPr lang="en-US" altLang="ko-KR" dirty="0"/>
               <a:t>AI </a:t>
             </a:r>
             <a:r>
-              <a:rPr lang="ko-KR" altLang="en-US" dirty="0" smtClean="0"/>
+              <a:rPr lang="ko-KR" altLang="en-US" dirty="0"/>
               <a:t>맞춤형으로 편하게 제시해준다</a:t>
             </a:r>
-            <a:endParaRPr lang="en-US" altLang="ko-KR" dirty="0" smtClean="0"/>
-          </a:p>
-          <a:p>
-            <a:r>
-              <a:rPr lang="en-US" altLang="ko-KR" dirty="0" smtClean="0"/>
+            <a:endParaRPr lang="en-US" altLang="ko-KR" dirty="0"/>
+          </a:p>
+          <a:p>
+            <a:r>
+              <a:rPr lang="en-US" altLang="ko-KR" dirty="0"/>
               <a:t>2. </a:t>
             </a:r>
             <a:r>
-              <a:rPr lang="ko-KR" altLang="en-US" dirty="0" smtClean="0"/>
+              <a:rPr lang="ko-KR" altLang="en-US" dirty="0"/>
               <a:t>봉사 후기를 </a:t>
             </a:r>
             <a:r>
-              <a:rPr lang="en-US" altLang="ko-KR" dirty="0" smtClean="0"/>
+              <a:rPr lang="en-US" altLang="ko-KR" dirty="0"/>
               <a:t>SNS </a:t>
             </a:r>
             <a:r>
-              <a:rPr lang="ko-KR" altLang="en-US" dirty="0" smtClean="0"/>
+              <a:rPr lang="ko-KR" altLang="en-US" dirty="0"/>
               <a:t>형식으로 사람들과 공유</a:t>
             </a:r>
             <a:r>
-              <a:rPr lang="en-US" altLang="ko-KR" dirty="0" smtClean="0"/>
+              <a:rPr lang="en-US" altLang="ko-KR" dirty="0"/>
               <a:t>(</a:t>
             </a:r>
             <a:r>
-              <a:rPr lang="ko-KR" altLang="en-US" dirty="0" smtClean="0"/>
+              <a:rPr lang="ko-KR" altLang="en-US" dirty="0"/>
               <a:t>또는 기록</a:t>
             </a:r>
             <a:r>
-              <a:rPr lang="en-US" altLang="ko-KR" dirty="0" smtClean="0"/>
+              <a:rPr lang="en-US" altLang="ko-KR" dirty="0"/>
               <a:t>)</a:t>
             </a:r>
             <a:r>
-              <a:rPr lang="ko-KR" altLang="en-US" dirty="0" smtClean="0"/>
+              <a:rPr lang="ko-KR" altLang="en-US" dirty="0"/>
               <a:t>한다</a:t>
             </a:r>
-            <a:endParaRPr lang="ko-KR" altLang="en-US" dirty="0"/>
+          </a:p>
+        </p:txBody>
+      </p:sp>
+      <p:sp>
+        <p:nvSpPr>
+          <p:cNvPr id="4" name="TextBox 3">
+            <a:extLst>
+              <a:ext uri="{FF2B5EF4-FFF2-40B4-BE49-F238E27FC236}">
+                <a16:creationId xmlns:a16="http://schemas.microsoft.com/office/drawing/2014/main" id="{77CA7CEA-DC64-4659-847C-1881999D64BF}"/>
+              </a:ext>
+            </a:extLst>
+          </p:cNvPr>
+          <p:cNvSpPr txBox="1"/>
+          <p:nvPr/>
+        </p:nvSpPr>
+        <p:spPr>
+          <a:xfrm>
+            <a:off x="1343216" y="4426213"/>
+            <a:ext cx="7498781" cy="1477328"/>
+          </a:xfrm>
+          <a:prstGeom prst="rect">
+            <a:avLst/>
+          </a:prstGeom>
+          <a:noFill/>
+        </p:spPr>
+        <p:txBody>
+          <a:bodyPr wrap="square" rtlCol="0">
+            <a:spAutoFit/>
+          </a:bodyPr>
+          <a:lstStyle/>
+          <a:p>
+            <a:r>
+              <a:rPr lang="en-US" altLang="ko-KR" dirty="0">
+                <a:solidFill>
+                  <a:srgbClr val="C00000"/>
+                </a:solidFill>
+              </a:rPr>
+              <a:t>*</a:t>
+            </a:r>
+            <a:r>
+              <a:rPr lang="ko-KR" altLang="en-US" dirty="0">
+                <a:solidFill>
+                  <a:srgbClr val="C00000"/>
+                </a:solidFill>
+              </a:rPr>
+              <a:t>피드백</a:t>
+            </a:r>
+            <a:r>
+              <a:rPr lang="en-US" altLang="ko-KR" dirty="0">
+                <a:solidFill>
+                  <a:srgbClr val="C00000"/>
+                </a:solidFill>
+              </a:rPr>
+              <a:t>: </a:t>
+            </a:r>
+            <a:r>
+              <a:rPr lang="ko-KR" altLang="en-US" dirty="0">
+                <a:solidFill>
+                  <a:srgbClr val="C00000"/>
+                </a:solidFill>
+              </a:rPr>
+              <a:t>그냥 </a:t>
+            </a:r>
+            <a:r>
+              <a:rPr lang="en-US" altLang="ko-KR" dirty="0">
+                <a:solidFill>
+                  <a:srgbClr val="C00000"/>
+                </a:solidFill>
+              </a:rPr>
+              <a:t>1365</a:t>
+            </a:r>
+            <a:r>
+              <a:rPr lang="ko-KR" altLang="en-US" dirty="0">
+                <a:solidFill>
+                  <a:srgbClr val="C00000"/>
+                </a:solidFill>
+              </a:rPr>
+              <a:t>가서 신청하지 </a:t>
+            </a:r>
+            <a:r>
+              <a:rPr lang="ko-KR" altLang="en-US" dirty="0" err="1">
+                <a:solidFill>
+                  <a:srgbClr val="C00000"/>
+                </a:solidFill>
+              </a:rPr>
+              <a:t>뭐하러</a:t>
+            </a:r>
+            <a:r>
+              <a:rPr lang="en-US" altLang="ko-KR" dirty="0">
+                <a:solidFill>
+                  <a:srgbClr val="C00000"/>
+                </a:solidFill>
+              </a:rPr>
+              <a:t>? </a:t>
+            </a:r>
+            <a:r>
+              <a:rPr lang="ko-KR" altLang="en-US" dirty="0">
+                <a:solidFill>
+                  <a:srgbClr val="C00000"/>
+                </a:solidFill>
+              </a:rPr>
+              <a:t>라는 의문점 해결필요</a:t>
+            </a:r>
+            <a:endParaRPr lang="en-US" altLang="ko-KR" dirty="0">
+              <a:solidFill>
+                <a:srgbClr val="C00000"/>
+              </a:solidFill>
+            </a:endParaRPr>
+          </a:p>
+          <a:p>
+            <a:endParaRPr lang="en-US" altLang="ko-KR" u="sng" dirty="0">
+              <a:solidFill>
+                <a:srgbClr val="C00000"/>
+              </a:solidFill>
+            </a:endParaRPr>
+          </a:p>
+          <a:p>
+            <a:r>
+              <a:rPr lang="en-US" altLang="ko-KR" u="sng" dirty="0">
+                <a:solidFill>
+                  <a:srgbClr val="C00000"/>
+                </a:solidFill>
+              </a:rPr>
+              <a:t>+) </a:t>
+            </a:r>
+            <a:r>
+              <a:rPr lang="ko-KR" altLang="en-US" u="sng" dirty="0">
+                <a:solidFill>
+                  <a:srgbClr val="C00000"/>
+                </a:solidFill>
+              </a:rPr>
+              <a:t>봉사를 구한다는 자원봉사자 구직도 넣으면 </a:t>
+            </a:r>
+            <a:r>
+              <a:rPr lang="ko-KR" altLang="en-US" u="sng" dirty="0" err="1">
+                <a:solidFill>
+                  <a:srgbClr val="C00000"/>
+                </a:solidFill>
+              </a:rPr>
+              <a:t>좋을듯</a:t>
+            </a:r>
+            <a:endParaRPr lang="en-US" altLang="ko-KR" u="sng" dirty="0">
+              <a:solidFill>
+                <a:srgbClr val="C00000"/>
+              </a:solidFill>
+            </a:endParaRPr>
+          </a:p>
+          <a:p>
+            <a:endParaRPr lang="en-US" altLang="ko-KR" u="sng" dirty="0">
+              <a:solidFill>
+                <a:srgbClr val="C00000"/>
+              </a:solidFill>
+            </a:endParaRPr>
+          </a:p>
+          <a:p>
+            <a:r>
+              <a:rPr lang="en-US" altLang="ko-KR" u="sng" dirty="0">
+                <a:solidFill>
+                  <a:srgbClr val="C00000"/>
+                </a:solidFill>
+              </a:rPr>
+              <a:t>*</a:t>
+            </a:r>
+            <a:r>
+              <a:rPr lang="ko-KR" altLang="en-US" u="sng" dirty="0">
+                <a:solidFill>
+                  <a:srgbClr val="C00000"/>
+                </a:solidFill>
+              </a:rPr>
+              <a:t>추가적으로 </a:t>
+            </a:r>
+            <a:r>
+              <a:rPr lang="en-US" altLang="ko-KR" u="sng" dirty="0">
+                <a:solidFill>
+                  <a:srgbClr val="C00000"/>
+                </a:solidFill>
+              </a:rPr>
+              <a:t>1365</a:t>
+            </a:r>
+            <a:r>
+              <a:rPr lang="ko-KR" altLang="en-US" u="sng" dirty="0">
+                <a:solidFill>
+                  <a:srgbClr val="C00000"/>
+                </a:solidFill>
+              </a:rPr>
+              <a:t>말고도 </a:t>
+            </a:r>
+            <a:r>
+              <a:rPr lang="en-US" altLang="ko-KR" u="sng" dirty="0">
+                <a:solidFill>
+                  <a:srgbClr val="C00000"/>
+                </a:solidFill>
+              </a:rPr>
+              <a:t>V</a:t>
+            </a:r>
+            <a:r>
+              <a:rPr lang="ko-KR" altLang="en-US" u="sng" dirty="0">
+                <a:solidFill>
+                  <a:srgbClr val="C00000"/>
+                </a:solidFill>
+              </a:rPr>
+              <a:t>사이트도 </a:t>
+            </a:r>
+            <a:r>
+              <a:rPr lang="ko-KR" altLang="en-US" u="sng" dirty="0" err="1">
+                <a:solidFill>
+                  <a:srgbClr val="C00000"/>
+                </a:solidFill>
+              </a:rPr>
+              <a:t>크롤링해오면됨</a:t>
+            </a:r>
+            <a:endParaRPr lang="ko-KR" altLang="en-US" u="sng" dirty="0">
+              <a:solidFill>
+                <a:srgbClr val="C00000"/>
+              </a:solidFill>
+            </a:endParaRPr>
           </a:p>
         </p:txBody>
       </p:sp>
@@ -7982,13 +8096,6 @@
   <p:clrMapOvr>
     <a:masterClrMapping/>
   </p:clrMapOvr>
-  <p:timing>
-    <p:tnLst>
-      <p:par>
-        <p:cTn id="1" dur="indefinite" restart="never" nodeType="tmRoot"/>
-      </p:par>
-    </p:tnLst>
-  </p:timing>
 </p:sld>
 </file>
 
@@ -8025,11 +8132,11 @@
           <a:lstStyle/>
           <a:p>
             <a:r>
-              <a:rPr lang="en-US" altLang="ko-KR" dirty="0" smtClean="0"/>
+              <a:rPr lang="en-US" altLang="ko-KR" dirty="0"/>
               <a:t>[Component] </a:t>
             </a:r>
             <a:r>
-              <a:rPr lang="en-US" altLang="ko-KR" dirty="0" err="1" smtClean="0"/>
+              <a:rPr lang="en-US" altLang="ko-KR" dirty="0" err="1"/>
               <a:t>NavBar.tsx</a:t>
             </a:r>
             <a:endParaRPr lang="ko-KR" altLang="en-US" dirty="0"/>
@@ -8107,55 +8214,43 @@
           <a:lstStyle/>
           <a:p>
             <a:r>
-              <a:rPr lang="en-US" altLang="ko-KR" dirty="0" smtClean="0"/>
+              <a:rPr lang="en-US" altLang="ko-KR" dirty="0"/>
               <a:t>-</a:t>
             </a:r>
             <a:r>
-              <a:rPr lang="ko-KR" altLang="en-US" dirty="0" smtClean="0"/>
+              <a:rPr lang="ko-KR" altLang="en-US" dirty="0"/>
               <a:t>슬라이더</a:t>
             </a:r>
             <a:r>
               <a:rPr lang="en-US" altLang="ko-KR" dirty="0"/>
-              <a:t> </a:t>
-            </a:r>
-            <a:r>
-              <a:rPr lang="en-US" altLang="ko-KR" dirty="0" smtClean="0"/>
-              <a:t>  -</a:t>
-            </a:r>
-            <a:r>
-              <a:rPr lang="ko-KR" altLang="en-US" dirty="0" err="1" smtClean="0"/>
+              <a:t>   -</a:t>
+            </a:r>
+            <a:r>
+              <a:rPr lang="ko-KR" altLang="en-US" dirty="0" err="1"/>
               <a:t>공고검색</a:t>
             </a:r>
             <a:r>
-              <a:rPr lang="en-US" altLang="ko-KR" dirty="0" smtClean="0"/>
+              <a:rPr lang="en-US" altLang="ko-KR" dirty="0"/>
               <a:t>   -</a:t>
             </a:r>
             <a:r>
-              <a:rPr lang="ko-KR" altLang="en-US" dirty="0" err="1" smtClean="0"/>
+              <a:rPr lang="ko-KR" altLang="en-US" dirty="0" err="1"/>
               <a:t>공고등록</a:t>
             </a:r>
             <a:r>
               <a:rPr lang="en-US" altLang="ko-KR" dirty="0"/>
-              <a:t>	</a:t>
-            </a:r>
-            <a:r>
-              <a:rPr lang="en-US" altLang="ko-KR" dirty="0" smtClean="0"/>
-              <a:t> -</a:t>
-            </a:r>
-            <a:r>
-              <a:rPr lang="ko-KR" altLang="en-US" dirty="0" err="1" smtClean="0"/>
+              <a:t>	 -</a:t>
+            </a:r>
+            <a:r>
+              <a:rPr lang="ko-KR" altLang="en-US" dirty="0" err="1"/>
               <a:t>피드</a:t>
             </a:r>
             <a:r>
               <a:rPr lang="en-US" altLang="ko-KR" dirty="0"/>
-              <a:t>	</a:t>
-            </a:r>
-            <a:r>
-              <a:rPr lang="en-US" altLang="ko-KR" dirty="0" smtClean="0"/>
-              <a:t>-</a:t>
-            </a:r>
-            <a:r>
-              <a:rPr lang="ko-KR" altLang="en-US" dirty="0" err="1" smtClean="0"/>
+              <a:t>	-</a:t>
+            </a:r>
+            <a:r>
+              <a:rPr lang="ko-KR" altLang="en-US" dirty="0" err="1"/>
               <a:t>마이페이지</a:t>
             </a:r>
             <a:endParaRPr lang="ko-KR" altLang="en-US" dirty="0"/>
@@ -8292,13 +8387,6 @@
   <p:clrMapOvr>
     <a:masterClrMapping/>
   </p:clrMapOvr>
-  <p:timing>
-    <p:tnLst>
-      <p:par>
-        <p:cTn id="1" dur="indefinite" restart="never" nodeType="tmRoot"/>
-      </p:par>
-    </p:tnLst>
-  </p:timing>
 </p:sld>
 </file>
 
@@ -8335,19 +8423,19 @@
           <a:lstStyle/>
           <a:p>
             <a:r>
-              <a:rPr lang="en-US" altLang="ko-KR" dirty="0" err="1" smtClean="0"/>
+              <a:rPr lang="en-US" altLang="ko-KR" dirty="0" err="1"/>
               <a:t>Slider.tsx</a:t>
             </a:r>
             <a:r>
-              <a:rPr lang="en-US" altLang="ko-KR" dirty="0" smtClean="0"/>
+              <a:rPr lang="en-US" altLang="ko-KR" dirty="0"/>
               <a:t> (AI </a:t>
             </a:r>
             <a:r>
-              <a:rPr lang="ko-KR" altLang="en-US" dirty="0" smtClean="0"/>
+              <a:rPr lang="ko-KR" altLang="en-US" dirty="0"/>
               <a:t>추천</a:t>
             </a:r>
             <a:r>
-              <a:rPr lang="en-US" altLang="ko-KR" dirty="0" smtClean="0"/>
+              <a:rPr lang="en-US" altLang="ko-KR" dirty="0"/>
               <a:t>)</a:t>
             </a:r>
             <a:endParaRPr lang="ko-KR" altLang="en-US" dirty="0"/>
@@ -8424,7 +8512,7 @@
               <a:buChar char="-"/>
             </a:pPr>
             <a:r>
-              <a:rPr lang="ko-KR" altLang="en-US" b="1" dirty="0" err="1" smtClean="0"/>
+              <a:rPr lang="ko-KR" altLang="en-US" b="1" dirty="0" err="1"/>
               <a:t>공고명</a:t>
             </a:r>
             <a:endParaRPr lang="en-US" altLang="ko-KR" b="1" dirty="0"/>
@@ -8435,38 +8523,38 @@
               <a:buChar char="-"/>
             </a:pPr>
             <a:r>
-              <a:rPr lang="ko-KR" altLang="en-US" b="1" dirty="0" smtClean="0"/>
+              <a:rPr lang="ko-KR" altLang="en-US" b="1" dirty="0"/>
               <a:t>공고 내용 요약</a:t>
             </a:r>
-            <a:endParaRPr lang="en-US" altLang="ko-KR" b="1" dirty="0" smtClean="0"/>
-          </a:p>
-          <a:p>
-            <a:r>
-              <a:rPr lang="en-US" altLang="ko-KR" sz="1400" b="1" dirty="0" smtClean="0"/>
+            <a:endParaRPr lang="en-US" altLang="ko-KR" b="1" dirty="0"/>
+          </a:p>
+          <a:p>
+            <a:r>
+              <a:rPr lang="en-US" altLang="ko-KR" sz="1400" b="1" dirty="0"/>
               <a:t>(</a:t>
             </a:r>
             <a:r>
-              <a:rPr lang="ko-KR" altLang="en-US" sz="1400" b="1" dirty="0" smtClean="0"/>
+              <a:rPr lang="ko-KR" altLang="en-US" sz="1400" b="1" dirty="0"/>
               <a:t>날짜</a:t>
             </a:r>
             <a:r>
-              <a:rPr lang="en-US" altLang="ko-KR" sz="1400" b="1" dirty="0" smtClean="0"/>
+              <a:rPr lang="en-US" altLang="ko-KR" sz="1400" b="1" dirty="0"/>
               <a:t>, </a:t>
             </a:r>
             <a:r>
-              <a:rPr lang="ko-KR" altLang="en-US" sz="1400" b="1" dirty="0" smtClean="0"/>
+              <a:rPr lang="ko-KR" altLang="en-US" sz="1400" b="1" dirty="0"/>
               <a:t>장소</a:t>
             </a:r>
             <a:r>
-              <a:rPr lang="en-US" altLang="ko-KR" sz="1400" b="1" dirty="0" smtClean="0"/>
+              <a:rPr lang="en-US" altLang="ko-KR" sz="1400" b="1" dirty="0"/>
               <a:t>, </a:t>
             </a:r>
             <a:r>
-              <a:rPr lang="ko-KR" altLang="en-US" sz="1400" b="1" dirty="0" smtClean="0"/>
+              <a:rPr lang="ko-KR" altLang="en-US" sz="1400" b="1" dirty="0"/>
               <a:t>업무내용 등</a:t>
             </a:r>
             <a:r>
-              <a:rPr lang="en-US" altLang="ko-KR" sz="1400" b="1" dirty="0" smtClean="0"/>
+              <a:rPr lang="en-US" altLang="ko-KR" sz="1400" b="1" dirty="0"/>
               <a:t>)</a:t>
             </a:r>
             <a:endParaRPr lang="ko-KR" altLang="en-US" sz="1400" b="1" dirty="0"/>
@@ -8537,21 +8625,20 @@
           <a:lstStyle/>
           <a:p>
             <a:r>
-              <a:rPr lang="en-US" altLang="ko-KR" dirty="0" smtClean="0"/>
+              <a:rPr lang="en-US" altLang="ko-KR" dirty="0"/>
               <a:t>*</a:t>
             </a:r>
             <a:r>
-              <a:rPr lang="ko-KR" altLang="en-US" dirty="0" smtClean="0"/>
+              <a:rPr lang="ko-KR" altLang="en-US" dirty="0"/>
               <a:t>후기 사진 없는 공고는 있어도</a:t>
             </a:r>
-            <a:endParaRPr lang="en-US" altLang="ko-KR" dirty="0" smtClean="0"/>
-          </a:p>
-          <a:p>
-            <a:r>
-              <a:rPr lang="ko-KR" altLang="en-US" dirty="0" smtClean="0"/>
+            <a:endParaRPr lang="en-US" altLang="ko-KR" dirty="0"/>
+          </a:p>
+          <a:p>
+            <a:r>
+              <a:rPr lang="ko-KR" altLang="en-US" dirty="0"/>
               <a:t>모든 공고는 지도를 가지고 있음 </a:t>
             </a:r>
-            <a:endParaRPr lang="ko-KR" altLang="en-US" dirty="0"/>
           </a:p>
         </p:txBody>
       </p:sp>
@@ -8619,40 +8706,40 @@
           <a:lstStyle/>
           <a:p>
             <a:r>
-              <a:rPr lang="ko-KR" altLang="en-US" dirty="0" smtClean="0"/>
+              <a:rPr lang="ko-KR" altLang="en-US" dirty="0"/>
               <a:t>해당 공고와 관련된 후기 사진을 표시</a:t>
             </a:r>
-            <a:endParaRPr lang="en-US" altLang="ko-KR" dirty="0" smtClean="0"/>
-          </a:p>
-          <a:p>
             <a:endParaRPr lang="en-US" altLang="ko-KR" dirty="0"/>
           </a:p>
           <a:p>
-            <a:r>
-              <a:rPr lang="ko-KR" altLang="en-US" dirty="0" err="1" smtClean="0"/>
+            <a:endParaRPr lang="en-US" altLang="ko-KR" dirty="0"/>
+          </a:p>
+          <a:p>
+            <a:r>
+              <a:rPr lang="ko-KR" altLang="en-US" dirty="0" err="1"/>
               <a:t>후기글이</a:t>
             </a:r>
             <a:r>
-              <a:rPr lang="ko-KR" altLang="en-US" dirty="0" smtClean="0"/>
+              <a:rPr lang="ko-KR" altLang="en-US" dirty="0"/>
               <a:t> 없다면</a:t>
             </a:r>
             <a:r>
-              <a:rPr lang="en-US" altLang="ko-KR" dirty="0" smtClean="0"/>
+              <a:rPr lang="en-US" altLang="ko-KR" dirty="0"/>
               <a:t>(</a:t>
             </a:r>
             <a:r>
-              <a:rPr lang="ko-KR" altLang="en-US" dirty="0" smtClean="0"/>
+              <a:rPr lang="ko-KR" altLang="en-US" dirty="0"/>
               <a:t>또는 후기 사진이 없다면</a:t>
             </a:r>
             <a:r>
-              <a:rPr lang="en-US" altLang="ko-KR" dirty="0" smtClean="0"/>
+              <a:rPr lang="en-US" altLang="ko-KR" dirty="0"/>
               <a:t>) </a:t>
             </a:r>
             <a:r>
-              <a:rPr lang="ko-KR" altLang="en-US" dirty="0" smtClean="0"/>
+              <a:rPr lang="ko-KR" altLang="en-US" dirty="0"/>
               <a:t>지도 표시</a:t>
             </a:r>
-            <a:endParaRPr lang="en-US" altLang="ko-KR" dirty="0" smtClean="0"/>
+            <a:endParaRPr lang="en-US" altLang="ko-KR" dirty="0"/>
           </a:p>
         </p:txBody>
       </p:sp>
@@ -8693,10 +8780,9 @@
           <a:p>
             <a:pPr algn="ctr"/>
             <a:r>
-              <a:rPr lang="ko-KR" altLang="en-US" smtClean="0"/>
-              <a:t>싫어요</a:t>
-            </a:r>
-            <a:endParaRPr lang="ko-KR" altLang="en-US"/>
+              <a:rPr lang="ko-KR" altLang="en-US" dirty="0"/>
+              <a:t>다음에</a:t>
+            </a:r>
           </a:p>
         </p:txBody>
       </p:sp>
@@ -8737,10 +8823,9 @@
           <a:p>
             <a:pPr algn="ctr"/>
             <a:r>
-              <a:rPr lang="ko-KR" altLang="en-US" smtClean="0"/>
-              <a:t>좋아요</a:t>
-            </a:r>
-            <a:endParaRPr lang="ko-KR" altLang="en-US"/>
+              <a:rPr lang="ko-KR" altLang="en-US" dirty="0"/>
+              <a:t>즐겨찾기</a:t>
+            </a:r>
           </a:p>
         </p:txBody>
       </p:sp>
@@ -8781,10 +8866,9 @@
           <a:p>
             <a:pPr algn="ctr"/>
             <a:r>
-              <a:rPr lang="ko-KR" altLang="en-US" dirty="0" smtClean="0"/>
+              <a:rPr lang="ko-KR" altLang="en-US" dirty="0"/>
               <a:t>상세보기</a:t>
             </a:r>
-            <a:endParaRPr lang="ko-KR" altLang="en-US" dirty="0"/>
           </a:p>
         </p:txBody>
       </p:sp>
@@ -8825,7 +8909,7 @@
           <a:p>
             <a:pPr algn="ctr"/>
             <a:r>
-              <a:rPr lang="en-US" altLang="ko-KR" dirty="0" smtClean="0"/>
+              <a:rPr lang="en-US" altLang="ko-KR" dirty="0"/>
               <a:t>&lt;Bong&gt;</a:t>
             </a:r>
           </a:p>
@@ -9087,71 +9171,70 @@
           <a:lstStyle/>
           <a:p>
             <a:r>
-              <a:rPr lang="en-US" altLang="ko-KR" dirty="0" smtClean="0"/>
+              <a:rPr lang="en-US" altLang="ko-KR" dirty="0"/>
               <a:t>+) </a:t>
             </a:r>
             <a:r>
-              <a:rPr lang="ko-KR" altLang="en-US" dirty="0" smtClean="0"/>
+              <a:rPr lang="ko-KR" altLang="en-US" dirty="0"/>
               <a:t>좋아요</a:t>
             </a:r>
             <a:r>
-              <a:rPr lang="en-US" altLang="ko-KR" dirty="0" smtClean="0"/>
+              <a:rPr lang="en-US" altLang="ko-KR" dirty="0"/>
               <a:t>, </a:t>
             </a:r>
             <a:r>
-              <a:rPr lang="ko-KR" altLang="en-US" dirty="0" err="1" smtClean="0"/>
+              <a:rPr lang="ko-KR" altLang="en-US" dirty="0" err="1"/>
               <a:t>싫어요는</a:t>
             </a:r>
             <a:r>
-              <a:rPr lang="ko-KR" altLang="en-US" dirty="0" smtClean="0"/>
+              <a:rPr lang="ko-KR" altLang="en-US" dirty="0"/>
               <a:t> </a:t>
             </a:r>
             <a:r>
-              <a:rPr lang="ko-KR" altLang="en-US" dirty="0" err="1" smtClean="0"/>
+              <a:rPr lang="ko-KR" altLang="en-US" dirty="0" err="1"/>
               <a:t>알고리즘용</a:t>
             </a:r>
-            <a:endParaRPr lang="en-US" altLang="ko-KR" dirty="0" smtClean="0"/>
-          </a:p>
-          <a:p>
-            <a:r>
-              <a:rPr lang="ko-KR" altLang="en-US" dirty="0" smtClean="0"/>
+            <a:endParaRPr lang="en-US" altLang="ko-KR" dirty="0"/>
+          </a:p>
+          <a:p>
+            <a:r>
+              <a:rPr lang="ko-KR" altLang="en-US" dirty="0"/>
               <a:t>신청은 </a:t>
             </a:r>
             <a:r>
-              <a:rPr lang="ko-KR" altLang="en-US" dirty="0" err="1" smtClean="0"/>
+              <a:rPr lang="ko-KR" altLang="en-US" dirty="0" err="1"/>
               <a:t>상세보기로</a:t>
             </a:r>
             <a:r>
-              <a:rPr lang="ko-KR" altLang="en-US" dirty="0" smtClean="0"/>
+              <a:rPr lang="ko-KR" altLang="en-US" dirty="0"/>
               <a:t> </a:t>
             </a:r>
             <a:r>
-              <a:rPr lang="ko-KR" altLang="en-US" dirty="0" err="1" smtClean="0"/>
+              <a:rPr lang="ko-KR" altLang="en-US" dirty="0" err="1"/>
               <a:t>신청해야함</a:t>
             </a:r>
-            <a:endParaRPr lang="en-US" altLang="ko-KR" dirty="0" smtClean="0"/>
-          </a:p>
-          <a:p>
             <a:endParaRPr lang="en-US" altLang="ko-KR" dirty="0"/>
           </a:p>
           <a:p>
-            <a:r>
-              <a:rPr lang="en-US" altLang="ko-KR" dirty="0" smtClean="0"/>
+            <a:endParaRPr lang="en-US" altLang="ko-KR" dirty="0"/>
+          </a:p>
+          <a:p>
+            <a:r>
+              <a:rPr lang="en-US" altLang="ko-KR" dirty="0"/>
               <a:t>+) </a:t>
             </a:r>
             <a:r>
-              <a:rPr lang="ko-KR" altLang="en-US" dirty="0" smtClean="0"/>
+              <a:rPr lang="ko-KR" altLang="en-US" dirty="0"/>
               <a:t>좋아요 목록은 </a:t>
             </a:r>
             <a:r>
-              <a:rPr lang="ko-KR" altLang="en-US" dirty="0" err="1" smtClean="0"/>
+              <a:rPr lang="ko-KR" altLang="en-US" dirty="0" err="1"/>
               <a:t>마이페이지에</a:t>
             </a:r>
             <a:r>
-              <a:rPr lang="ko-KR" altLang="en-US" dirty="0" smtClean="0"/>
+              <a:rPr lang="ko-KR" altLang="en-US" dirty="0"/>
               <a:t> 저장</a:t>
             </a:r>
-            <a:endParaRPr lang="ko-KR" altLang="en-US" dirty="0"/>
           </a:p>
         </p:txBody>
       </p:sp>
@@ -9165,13 +9248,6 @@
   <p:clrMapOvr>
     <a:masterClrMapping/>
   </p:clrMapOvr>
-  <p:timing>
-    <p:tnLst>
-      <p:par>
-        <p:cTn id="1" dur="indefinite" restart="never" nodeType="tmRoot"/>
-      </p:par>
-    </p:tnLst>
-  </p:timing>
 </p:sld>
 </file>
 
@@ -9208,19 +9284,19 @@
           <a:lstStyle/>
           <a:p>
             <a:r>
-              <a:rPr lang="en-US" altLang="ko-KR" dirty="0" err="1" smtClean="0"/>
+              <a:rPr lang="en-US" altLang="ko-KR" dirty="0" err="1"/>
               <a:t>Bong.tsx</a:t>
             </a:r>
             <a:r>
-              <a:rPr lang="en-US" altLang="ko-KR" dirty="0" smtClean="0"/>
+              <a:rPr lang="en-US" altLang="ko-KR" dirty="0"/>
               <a:t> (</a:t>
             </a:r>
             <a:r>
-              <a:rPr lang="ko-KR" altLang="en-US" dirty="0" smtClean="0"/>
+              <a:rPr lang="ko-KR" altLang="en-US" dirty="0"/>
               <a:t>공고 상세보기</a:t>
             </a:r>
             <a:r>
-              <a:rPr lang="en-US" altLang="ko-KR" dirty="0" smtClean="0"/>
+              <a:rPr lang="en-US" altLang="ko-KR" dirty="0"/>
               <a:t>)</a:t>
             </a:r>
             <a:endParaRPr lang="ko-KR" altLang="en-US" dirty="0"/>
@@ -9235,7 +9311,7 @@
         </p:nvSpPr>
         <p:spPr>
           <a:xfrm>
-            <a:off x="4271275" y="4642637"/>
+            <a:off x="4204163" y="4449228"/>
             <a:ext cx="4243963" cy="369332"/>
           </a:xfrm>
           <a:prstGeom prst="rect">
@@ -9250,10 +9326,9 @@
           <a:lstStyle/>
           <a:p>
             <a:r>
-              <a:rPr lang="ko-KR" altLang="en-US" dirty="0" smtClean="0"/>
+              <a:rPr lang="ko-KR" altLang="en-US" dirty="0"/>
               <a:t>해당 공고와 연관된 후기들이 나옴</a:t>
             </a:r>
-            <a:endParaRPr lang="ko-KR" altLang="en-US" dirty="0"/>
           </a:p>
         </p:txBody>
       </p:sp>
@@ -9294,7 +9369,7 @@
           <a:p>
             <a:pPr algn="ctr"/>
             <a:r>
-              <a:rPr lang="en-US" altLang="ko-KR" dirty="0" smtClean="0"/>
+              <a:rPr lang="en-US" altLang="ko-KR" dirty="0"/>
               <a:t>&lt;Bong&gt;</a:t>
             </a:r>
           </a:p>
@@ -9554,7 +9629,7 @@
         </p:blipFill>
         <p:spPr>
           <a:xfrm>
-            <a:off x="1162974" y="4338527"/>
+            <a:off x="1171363" y="4321749"/>
             <a:ext cx="2734835" cy="1380462"/>
           </a:xfrm>
           <a:prstGeom prst="rect">
@@ -9599,7 +9674,7 @@
           <a:p>
             <a:pPr algn="ctr"/>
             <a:r>
-              <a:rPr lang="en-US" altLang="ko-KR" dirty="0" smtClean="0"/>
+              <a:rPr lang="en-US" altLang="ko-KR" dirty="0"/>
               <a:t>&lt;Review&gt;</a:t>
             </a:r>
           </a:p>
@@ -9673,21 +9748,21 @@
           <a:lstStyle/>
           <a:p>
             <a:r>
-              <a:rPr lang="ko-KR" altLang="en-US" dirty="0" err="1" smtClean="0"/>
+              <a:rPr lang="ko-KR" altLang="en-US" dirty="0" err="1"/>
               <a:t>봉사기관명</a:t>
             </a:r>
-            <a:endParaRPr lang="en-US" altLang="ko-KR" dirty="0" smtClean="0"/>
-          </a:p>
-          <a:p>
-            <a:r>
-              <a:rPr lang="ko-KR" altLang="en-US" dirty="0" err="1" smtClean="0"/>
+            <a:endParaRPr lang="en-US" altLang="ko-KR" dirty="0"/>
+          </a:p>
+          <a:p>
+            <a:r>
+              <a:rPr lang="ko-KR" altLang="en-US" dirty="0" err="1"/>
               <a:t>봉사기간</a:t>
             </a:r>
             <a:r>
-              <a:rPr lang="ko-KR" altLang="en-US" dirty="0" smtClean="0"/>
+              <a:rPr lang="ko-KR" altLang="en-US" dirty="0"/>
               <a:t> 등</a:t>
             </a:r>
-            <a:endParaRPr lang="en-US" altLang="ko-KR" dirty="0" smtClean="0"/>
+            <a:endParaRPr lang="en-US" altLang="ko-KR" dirty="0"/>
           </a:p>
         </p:txBody>
       </p:sp>
@@ -9718,10 +9793,10 @@
               <a:buChar char="-"/>
             </a:pPr>
             <a:r>
-              <a:rPr lang="ko-KR" altLang="en-US" dirty="0" smtClean="0"/>
+              <a:rPr lang="ko-KR" altLang="en-US" dirty="0"/>
               <a:t>자세한 정보들</a:t>
             </a:r>
-            <a:endParaRPr lang="en-US" altLang="ko-KR" dirty="0" smtClean="0"/>
+            <a:endParaRPr lang="en-US" altLang="ko-KR" dirty="0"/>
           </a:p>
           <a:p>
             <a:pPr marL="285750" indent="-285750">
@@ -9729,10 +9804,10 @@
               <a:buChar char="-"/>
             </a:pPr>
             <a:r>
-              <a:rPr lang="ko-KR" altLang="en-US" dirty="0" smtClean="0"/>
+              <a:rPr lang="ko-KR" altLang="en-US" dirty="0"/>
               <a:t>이런저런 정보</a:t>
             </a:r>
-            <a:endParaRPr lang="en-US" altLang="ko-KR" dirty="0" smtClean="0"/>
+            <a:endParaRPr lang="en-US" altLang="ko-KR" dirty="0"/>
           </a:p>
         </p:txBody>
       </p:sp>
@@ -9763,10 +9838,10 @@
               <a:buChar char="-"/>
             </a:pPr>
             <a:r>
-              <a:rPr lang="ko-KR" altLang="en-US" dirty="0" smtClean="0"/>
+              <a:rPr lang="ko-KR" altLang="en-US" dirty="0"/>
               <a:t>지도 시스템</a:t>
             </a:r>
-            <a:endParaRPr lang="en-US" altLang="ko-KR" dirty="0" smtClean="0"/>
+            <a:endParaRPr lang="en-US" altLang="ko-KR" dirty="0"/>
           </a:p>
           <a:p>
             <a:pPr marL="285750" indent="-285750">
@@ -9781,19 +9856,19 @@
               <a:buChar char="-"/>
             </a:pPr>
             <a:r>
-              <a:rPr lang="ko-KR" altLang="en-US" dirty="0" smtClean="0"/>
+              <a:rPr lang="ko-KR" altLang="en-US" dirty="0"/>
               <a:t>해당 봉사 사이트로 이동해주는 버튼</a:t>
             </a:r>
             <a:r>
-              <a:rPr lang="en-US" altLang="ko-KR" dirty="0" smtClean="0"/>
+              <a:rPr lang="en-US" altLang="ko-KR" dirty="0"/>
               <a:t>(</a:t>
             </a:r>
             <a:r>
-              <a:rPr lang="ko-KR" altLang="en-US" dirty="0" smtClean="0"/>
+              <a:rPr lang="ko-KR" altLang="en-US" dirty="0"/>
               <a:t>신청</a:t>
             </a:r>
             <a:r>
-              <a:rPr lang="en-US" altLang="ko-KR" dirty="0" smtClean="0"/>
+              <a:rPr lang="en-US" altLang="ko-KR" dirty="0"/>
               <a:t>)</a:t>
             </a:r>
           </a:p>
@@ -9803,11 +9878,11 @@
               <a:buChar char="Þ"/>
             </a:pPr>
             <a:r>
-              <a:rPr lang="ko-KR" altLang="en-US" dirty="0" smtClean="0"/>
+              <a:rPr lang="ko-KR" altLang="en-US" dirty="0"/>
               <a:t>비회원으로 신청 버튼 누르면</a:t>
             </a:r>
             <a:r>
-              <a:rPr lang="en-US" altLang="ko-KR" dirty="0" smtClean="0"/>
+              <a:rPr lang="en-US" altLang="ko-KR" dirty="0"/>
               <a:t>, </a:t>
             </a:r>
           </a:p>
@@ -9817,27 +9892,27 @@
               <a:buChar char="Þ"/>
             </a:pPr>
             <a:r>
-              <a:rPr lang="ko-KR" altLang="en-US" dirty="0" smtClean="0"/>
+              <a:rPr lang="ko-KR" altLang="en-US" dirty="0"/>
               <a:t>따로 </a:t>
             </a:r>
             <a:r>
-              <a:rPr lang="ko-KR" altLang="en-US" dirty="0" err="1" smtClean="0"/>
+              <a:rPr lang="ko-KR" altLang="en-US" dirty="0" err="1"/>
               <a:t>후기글</a:t>
             </a:r>
             <a:r>
-              <a:rPr lang="ko-KR" altLang="en-US" dirty="0" smtClean="0"/>
+              <a:rPr lang="ko-KR" altLang="en-US" dirty="0"/>
               <a:t> 요청 없음</a:t>
             </a:r>
             <a:r>
-              <a:rPr lang="en-US" altLang="ko-KR" dirty="0" smtClean="0"/>
+              <a:rPr lang="en-US" altLang="ko-KR" dirty="0"/>
               <a:t>(</a:t>
             </a:r>
             <a:r>
-              <a:rPr lang="ko-KR" altLang="en-US" dirty="0" smtClean="0"/>
+              <a:rPr lang="ko-KR" altLang="en-US" dirty="0"/>
               <a:t>작성 불가</a:t>
             </a:r>
             <a:r>
-              <a:rPr lang="en-US" altLang="ko-KR" dirty="0" smtClean="0"/>
+              <a:rPr lang="en-US" altLang="ko-KR" dirty="0"/>
               <a:t>)</a:t>
             </a:r>
             <a:endParaRPr lang="ko-KR" altLang="en-US" dirty="0"/>
@@ -9881,10 +9956,214 @@
           <a:p>
             <a:pPr algn="ctr"/>
             <a:r>
-              <a:rPr lang="ko-KR" altLang="en-US" dirty="0" smtClean="0"/>
+              <a:rPr lang="ko-KR" altLang="en-US" dirty="0"/>
               <a:t>신청 버튼</a:t>
             </a:r>
-            <a:endParaRPr lang="ko-KR" altLang="en-US" dirty="0"/>
+          </a:p>
+        </p:txBody>
+      </p:sp>
+      <p:sp>
+        <p:nvSpPr>
+          <p:cNvPr id="3" name="TextBox 2">
+            <a:extLst>
+              <a:ext uri="{FF2B5EF4-FFF2-40B4-BE49-F238E27FC236}">
+                <a16:creationId xmlns:a16="http://schemas.microsoft.com/office/drawing/2014/main" id="{E9D60D76-A39B-4227-8799-E0B937CCCB3B}"/>
+              </a:ext>
+            </a:extLst>
+          </p:cNvPr>
+          <p:cNvSpPr txBox="1"/>
+          <p:nvPr/>
+        </p:nvSpPr>
+        <p:spPr>
+          <a:xfrm>
+            <a:off x="4480699" y="5233512"/>
+            <a:ext cx="6937702" cy="923330"/>
+          </a:xfrm>
+          <a:prstGeom prst="rect">
+            <a:avLst/>
+          </a:prstGeom>
+          <a:noFill/>
+        </p:spPr>
+        <p:txBody>
+          <a:bodyPr wrap="square" rtlCol="0">
+            <a:spAutoFit/>
+          </a:bodyPr>
+          <a:lstStyle/>
+          <a:p>
+            <a:r>
+              <a:rPr lang="en-US" altLang="ko-KR" dirty="0">
+                <a:solidFill>
+                  <a:srgbClr val="C00000"/>
+                </a:solidFill>
+              </a:rPr>
+              <a:t>*</a:t>
+            </a:r>
+            <a:r>
+              <a:rPr lang="ko-KR" altLang="en-US" dirty="0">
+                <a:solidFill>
+                  <a:srgbClr val="C00000"/>
+                </a:solidFill>
+              </a:rPr>
+              <a:t>피드백</a:t>
+            </a:r>
+            <a:r>
+              <a:rPr lang="en-US" altLang="ko-KR" dirty="0">
+                <a:solidFill>
+                  <a:srgbClr val="C00000"/>
+                </a:solidFill>
+              </a:rPr>
+              <a:t>: </a:t>
+            </a:r>
+            <a:r>
+              <a:rPr lang="ko-KR" altLang="en-US" dirty="0">
+                <a:solidFill>
+                  <a:srgbClr val="C00000"/>
+                </a:solidFill>
+              </a:rPr>
+              <a:t>가능하면 신청을 여기서</a:t>
+            </a:r>
+            <a:r>
+              <a:rPr lang="en-US" altLang="ko-KR" dirty="0">
+                <a:solidFill>
+                  <a:srgbClr val="C00000"/>
+                </a:solidFill>
+              </a:rPr>
+              <a:t>, </a:t>
+            </a:r>
+            <a:r>
+              <a:rPr lang="ko-KR" altLang="en-US" dirty="0">
+                <a:solidFill>
+                  <a:srgbClr val="C00000"/>
+                </a:solidFill>
+              </a:rPr>
+              <a:t>이중이라 </a:t>
+            </a:r>
+            <a:r>
+              <a:rPr lang="ko-KR" altLang="en-US" dirty="0" err="1">
+                <a:solidFill>
+                  <a:srgbClr val="C00000"/>
+                </a:solidFill>
+              </a:rPr>
+              <a:t>불편할수도</a:t>
+            </a:r>
+            <a:endParaRPr lang="en-US" altLang="ko-KR" dirty="0">
+              <a:solidFill>
+                <a:srgbClr val="C00000"/>
+              </a:solidFill>
+            </a:endParaRPr>
+          </a:p>
+          <a:p>
+            <a:pPr marL="285750" indent="-285750">
+              <a:buFont typeface="Symbol" panose="05050102010706020507" pitchFamily="18" charset="2"/>
+              <a:buChar char="Þ"/>
+            </a:pPr>
+            <a:r>
+              <a:rPr lang="en-US" altLang="ko-KR" dirty="0">
+                <a:solidFill>
+                  <a:srgbClr val="C00000"/>
+                </a:solidFill>
+              </a:rPr>
+              <a:t>“</a:t>
+            </a:r>
+            <a:r>
+              <a:rPr lang="ko-KR" altLang="en-US" dirty="0">
+                <a:solidFill>
+                  <a:srgbClr val="C00000"/>
+                </a:solidFill>
+              </a:rPr>
+              <a:t>전화번호</a:t>
+            </a:r>
+            <a:r>
+              <a:rPr lang="en-US" altLang="ko-KR" dirty="0">
+                <a:solidFill>
+                  <a:srgbClr val="C00000"/>
+                </a:solidFill>
+              </a:rPr>
+              <a:t>”</a:t>
+            </a:r>
+            <a:r>
+              <a:rPr lang="ko-KR" altLang="en-US" dirty="0">
+                <a:solidFill>
+                  <a:srgbClr val="C00000"/>
+                </a:solidFill>
+              </a:rPr>
+              <a:t>를 </a:t>
+            </a:r>
+            <a:r>
+              <a:rPr lang="ko-KR" altLang="en-US" dirty="0" err="1">
+                <a:solidFill>
+                  <a:srgbClr val="C00000"/>
+                </a:solidFill>
+              </a:rPr>
+              <a:t>크롤링으로</a:t>
+            </a:r>
+            <a:r>
+              <a:rPr lang="ko-KR" altLang="en-US" dirty="0">
+                <a:solidFill>
+                  <a:srgbClr val="C00000"/>
+                </a:solidFill>
+              </a:rPr>
+              <a:t> 따올까</a:t>
+            </a:r>
+            <a:r>
+              <a:rPr lang="en-US" altLang="ko-KR" dirty="0">
+                <a:solidFill>
+                  <a:srgbClr val="C00000"/>
+                </a:solidFill>
+              </a:rPr>
+              <a:t>, 1365 </a:t>
+            </a:r>
+            <a:r>
+              <a:rPr lang="ko-KR" altLang="en-US" dirty="0">
+                <a:solidFill>
+                  <a:srgbClr val="C00000"/>
+                </a:solidFill>
+              </a:rPr>
+              <a:t>외 타겟 확장성 언급</a:t>
+            </a:r>
+            <a:endParaRPr lang="en-US" altLang="ko-KR" dirty="0">
+              <a:solidFill>
+                <a:srgbClr val="C00000"/>
+              </a:solidFill>
+            </a:endParaRPr>
+          </a:p>
+          <a:p>
+            <a:pPr marL="285750" indent="-285750">
+              <a:buFont typeface="Symbol" panose="05050102010706020507" pitchFamily="18" charset="2"/>
+              <a:buChar char="Þ"/>
+            </a:pPr>
+            <a:r>
+              <a:rPr lang="ko-KR" altLang="en-US" u="sng" dirty="0">
+                <a:solidFill>
+                  <a:srgbClr val="C00000"/>
+                </a:solidFill>
+              </a:rPr>
+              <a:t>자동으로 등록할 수 있게</a:t>
+            </a:r>
+            <a:r>
+              <a:rPr lang="en-US" altLang="ko-KR" u="sng" dirty="0">
+                <a:solidFill>
+                  <a:srgbClr val="C00000"/>
+                </a:solidFill>
+              </a:rPr>
+              <a:t>, HTML </a:t>
+            </a:r>
+            <a:r>
+              <a:rPr lang="ko-KR" altLang="en-US" u="sng" dirty="0" err="1">
+                <a:solidFill>
+                  <a:srgbClr val="C00000"/>
+                </a:solidFill>
+              </a:rPr>
+              <a:t>크롤링처럼</a:t>
+            </a:r>
+            <a:r>
+              <a:rPr lang="ko-KR" altLang="en-US" u="sng" dirty="0">
+                <a:solidFill>
+                  <a:srgbClr val="C00000"/>
+                </a:solidFill>
+              </a:rPr>
+              <a:t> 원격 가능하다 함</a:t>
+            </a:r>
           </a:p>
         </p:txBody>
       </p:sp>
@@ -9898,13 +10177,6 @@
   <p:clrMapOvr>
     <a:masterClrMapping/>
   </p:clrMapOvr>
-  <p:timing>
-    <p:tnLst>
-      <p:par>
-        <p:cTn id="1" dur="indefinite" restart="never" nodeType="tmRoot"/>
-      </p:par>
-    </p:tnLst>
-  </p:timing>
 </p:sld>
 </file>
 
@@ -9993,7 +10265,7 @@
           <a:lstStyle/>
           <a:p>
             <a:r>
-              <a:rPr lang="en-US" altLang="ko-KR" dirty="0" err="1" smtClean="0"/>
+              <a:rPr lang="en-US" altLang="ko-KR" dirty="0" err="1"/>
               <a:t>Write.tsx</a:t>
             </a:r>
             <a:endParaRPr lang="ko-KR" altLang="en-US" dirty="0"/>
@@ -10027,7 +10299,7 @@
               <a:buChar char="-"/>
             </a:pPr>
             <a:r>
-              <a:rPr lang="ko-KR" altLang="en-US" dirty="0" smtClean="0"/>
+              <a:rPr lang="ko-KR" altLang="en-US" dirty="0"/>
               <a:t>참여하기 버튼을 눌렀던 공고에 대해</a:t>
             </a:r>
             <a:endParaRPr lang="en-US" altLang="ko-KR" dirty="0"/>
@@ -10038,27 +10310,27 @@
               <a:buChar char="-"/>
             </a:pPr>
             <a:r>
-              <a:rPr lang="ko-KR" altLang="en-US" dirty="0" smtClean="0"/>
+              <a:rPr lang="ko-KR" altLang="en-US" dirty="0"/>
               <a:t>해당 공고의 참여 날짜 직후에 후기 </a:t>
             </a:r>
             <a:r>
-              <a:rPr lang="ko-KR" altLang="en-US" dirty="0" err="1" smtClean="0"/>
+              <a:rPr lang="ko-KR" altLang="en-US" dirty="0" err="1"/>
               <a:t>작성글</a:t>
             </a:r>
             <a:r>
-              <a:rPr lang="ko-KR" altLang="en-US" dirty="0" smtClean="0"/>
+              <a:rPr lang="ko-KR" altLang="en-US" dirty="0"/>
               <a:t> 요청 팝업</a:t>
             </a:r>
             <a:r>
-              <a:rPr lang="en-US" altLang="ko-KR" dirty="0" smtClean="0"/>
+              <a:rPr lang="en-US" altLang="ko-KR" dirty="0"/>
               <a:t>(</a:t>
             </a:r>
             <a:r>
-              <a:rPr lang="ko-KR" altLang="en-US" dirty="0" smtClean="0"/>
+              <a:rPr lang="ko-KR" altLang="en-US" dirty="0"/>
               <a:t>알림</a:t>
             </a:r>
             <a:r>
-              <a:rPr lang="en-US" altLang="ko-KR" dirty="0" smtClean="0"/>
+              <a:rPr lang="en-US" altLang="ko-KR" dirty="0"/>
               <a:t>)</a:t>
             </a:r>
           </a:p>
@@ -10068,18 +10340,18 @@
               <a:buChar char="-"/>
             </a:pPr>
             <a:r>
-              <a:rPr lang="ko-KR" altLang="en-US" dirty="0" smtClean="0"/>
+              <a:rPr lang="ko-KR" altLang="en-US" dirty="0"/>
               <a:t>참여했다고 답하면 </a:t>
             </a:r>
             <a:r>
-              <a:rPr lang="en-US" altLang="ko-KR" dirty="0" err="1" smtClean="0"/>
+              <a:rPr lang="en-US" altLang="ko-KR" dirty="0" err="1"/>
               <a:t>Write.tsx</a:t>
             </a:r>
             <a:r>
-              <a:rPr lang="ko-KR" altLang="en-US" dirty="0" smtClean="0"/>
+              <a:rPr lang="ko-KR" altLang="en-US" dirty="0"/>
               <a:t>로 이동</a:t>
             </a:r>
-            <a:endParaRPr lang="en-US" altLang="ko-KR" dirty="0" smtClean="0"/>
+            <a:endParaRPr lang="en-US" altLang="ko-KR" dirty="0"/>
           </a:p>
           <a:p>
             <a:pPr marL="285750" indent="-285750">
@@ -10094,65 +10366,64 @@
               <a:buChar char="-"/>
             </a:pPr>
             <a:r>
-              <a:rPr lang="ko-KR" altLang="en-US" dirty="0" smtClean="0"/>
+              <a:rPr lang="ko-KR" altLang="en-US" dirty="0"/>
               <a:t>사용자가 </a:t>
             </a:r>
             <a:r>
-              <a:rPr lang="en-US" altLang="ko-KR" dirty="0" smtClean="0"/>
+              <a:rPr lang="en-US" altLang="ko-KR" dirty="0"/>
               <a:t>private</a:t>
             </a:r>
             <a:r>
-              <a:rPr lang="ko-KR" altLang="en-US" dirty="0" smtClean="0"/>
+              <a:rPr lang="ko-KR" altLang="en-US" dirty="0"/>
               <a:t>으로 설정하면 </a:t>
             </a:r>
             <a:r>
-              <a:rPr lang="ko-KR" altLang="en-US" dirty="0" err="1" smtClean="0"/>
+              <a:rPr lang="ko-KR" altLang="en-US" dirty="0" err="1"/>
               <a:t>피드에</a:t>
             </a:r>
             <a:r>
-              <a:rPr lang="ko-KR" altLang="en-US" dirty="0" smtClean="0"/>
+              <a:rPr lang="ko-KR" altLang="en-US" dirty="0"/>
               <a:t> 안올리고 </a:t>
             </a:r>
             <a:r>
-              <a:rPr lang="ko-KR" altLang="en-US" dirty="0" err="1" smtClean="0"/>
+              <a:rPr lang="ko-KR" altLang="en-US" dirty="0" err="1"/>
               <a:t>마이페이지에서만</a:t>
             </a:r>
             <a:r>
-              <a:rPr lang="ko-KR" altLang="en-US" dirty="0" smtClean="0"/>
+              <a:rPr lang="ko-KR" altLang="en-US" dirty="0"/>
               <a:t> 확인</a:t>
             </a:r>
-            <a:endParaRPr lang="en-US" altLang="ko-KR" dirty="0" smtClean="0"/>
-          </a:p>
-          <a:p>
-            <a:r>
-              <a:rPr lang="en-US" altLang="ko-KR" dirty="0" smtClean="0"/>
+            <a:endParaRPr lang="en-US" altLang="ko-KR" dirty="0"/>
+          </a:p>
+          <a:p>
+            <a:r>
+              <a:rPr lang="en-US" altLang="ko-KR" dirty="0"/>
               <a:t>(</a:t>
             </a:r>
             <a:r>
-              <a:rPr lang="ko-KR" altLang="en-US" dirty="0" smtClean="0"/>
+              <a:rPr lang="ko-KR" altLang="en-US" dirty="0"/>
               <a:t>후기 객체의 </a:t>
             </a:r>
             <a:r>
-              <a:rPr lang="en-US" altLang="ko-KR" dirty="0" smtClean="0"/>
+              <a:rPr lang="en-US" altLang="ko-KR" dirty="0"/>
               <a:t>private</a:t>
             </a:r>
             <a:r>
-              <a:rPr lang="ko-KR" altLang="en-US" dirty="0" smtClean="0"/>
+              <a:rPr lang="ko-KR" altLang="en-US" dirty="0"/>
               <a:t>여부는 </a:t>
             </a:r>
             <a:r>
-              <a:rPr lang="ko-KR" altLang="en-US" dirty="0" err="1" smtClean="0"/>
+              <a:rPr lang="ko-KR" altLang="en-US" dirty="0" err="1"/>
               <a:t>마이페이지에서</a:t>
             </a:r>
             <a:r>
-              <a:rPr lang="ko-KR" altLang="en-US" dirty="0" smtClean="0"/>
+              <a:rPr lang="ko-KR" altLang="en-US" dirty="0"/>
               <a:t> 수동으로 변경가능</a:t>
             </a:r>
             <a:r>
-              <a:rPr lang="en-US" altLang="ko-KR" dirty="0" smtClean="0"/>
+              <a:rPr lang="en-US" altLang="ko-KR" dirty="0"/>
               <a:t>)</a:t>
             </a:r>
-            <a:endParaRPr lang="en-US" altLang="ko-KR" dirty="0"/>
           </a:p>
         </p:txBody>
       </p:sp>
@@ -10376,7 +10647,7 @@
           <a:p>
             <a:pPr algn="ctr"/>
             <a:r>
-              <a:rPr lang="en-US" altLang="ko-KR" dirty="0" smtClean="0"/>
+              <a:rPr lang="en-US" altLang="ko-KR" dirty="0"/>
               <a:t>&lt;Review&gt;</a:t>
             </a:r>
           </a:p>
@@ -10454,10 +10725,9 @@
               <a:buChar char="-"/>
             </a:pPr>
             <a:r>
-              <a:rPr lang="ko-KR" altLang="en-US" dirty="0" smtClean="0"/>
+              <a:rPr lang="ko-KR" altLang="en-US" dirty="0"/>
               <a:t>후기 객체에 넣을 내용 수동으로 작성</a:t>
             </a:r>
-            <a:endParaRPr lang="ko-KR" altLang="en-US" dirty="0"/>
           </a:p>
         </p:txBody>
       </p:sp>
@@ -10498,10 +10768,160 @@
           <a:p>
             <a:pPr algn="ctr"/>
             <a:r>
-              <a:rPr lang="ko-KR" altLang="en-US" dirty="0" smtClean="0"/>
+              <a:rPr lang="ko-KR" altLang="en-US" dirty="0"/>
               <a:t>게시 버튼</a:t>
             </a:r>
-            <a:endParaRPr lang="ko-KR" altLang="en-US" dirty="0"/>
+          </a:p>
+        </p:txBody>
+      </p:sp>
+      <p:sp>
+        <p:nvSpPr>
+          <p:cNvPr id="16" name="TextBox 15">
+            <a:extLst>
+              <a:ext uri="{FF2B5EF4-FFF2-40B4-BE49-F238E27FC236}">
+                <a16:creationId xmlns:a16="http://schemas.microsoft.com/office/drawing/2014/main" id="{83768796-F182-4E19-A869-748D39E69315}"/>
+              </a:ext>
+            </a:extLst>
+          </p:cNvPr>
+          <p:cNvSpPr txBox="1"/>
+          <p:nvPr/>
+        </p:nvSpPr>
+        <p:spPr>
+          <a:xfrm>
+            <a:off x="4321629" y="4847560"/>
+            <a:ext cx="7498781" cy="1200329"/>
+          </a:xfrm>
+          <a:prstGeom prst="rect">
+            <a:avLst/>
+          </a:prstGeom>
+          <a:noFill/>
+        </p:spPr>
+        <p:txBody>
+          <a:bodyPr wrap="square" rtlCol="0">
+            <a:spAutoFit/>
+          </a:bodyPr>
+          <a:lstStyle/>
+          <a:p>
+            <a:r>
+              <a:rPr lang="en-US" altLang="ko-KR" dirty="0">
+                <a:solidFill>
+                  <a:srgbClr val="C00000"/>
+                </a:solidFill>
+              </a:rPr>
+              <a:t>*</a:t>
+            </a:r>
+            <a:r>
+              <a:rPr lang="ko-KR" altLang="en-US" dirty="0">
+                <a:solidFill>
+                  <a:srgbClr val="C00000"/>
+                </a:solidFill>
+              </a:rPr>
+              <a:t>피드백</a:t>
+            </a:r>
+            <a:r>
+              <a:rPr lang="en-US" altLang="ko-KR" dirty="0">
+                <a:solidFill>
+                  <a:srgbClr val="C00000"/>
+                </a:solidFill>
+              </a:rPr>
+              <a:t>: </a:t>
+            </a:r>
+            <a:r>
+              <a:rPr lang="ko-KR" altLang="en-US" dirty="0">
+                <a:solidFill>
+                  <a:srgbClr val="C00000"/>
+                </a:solidFill>
+              </a:rPr>
+              <a:t>신청에 대한 상태 추적을 통해 봉사 후기에 대한 정확도 향상</a:t>
+            </a:r>
+            <a:endParaRPr lang="en-US" altLang="ko-KR" dirty="0">
+              <a:solidFill>
+                <a:srgbClr val="C00000"/>
+              </a:solidFill>
+            </a:endParaRPr>
+          </a:p>
+          <a:p>
+            <a:pPr marL="285750" indent="-285750">
+              <a:buFont typeface="Symbol" panose="05050102010706020507" pitchFamily="18" charset="2"/>
+              <a:buChar char="Þ"/>
+            </a:pPr>
+            <a:r>
+              <a:rPr lang="ko-KR" altLang="en-US" u="sng" dirty="0">
+                <a:solidFill>
+                  <a:srgbClr val="C00000"/>
+                </a:solidFill>
+              </a:rPr>
+              <a:t>봉사 실제로 했는지에 대한 검증 </a:t>
+            </a:r>
+            <a:r>
+              <a:rPr lang="en-US" altLang="ko-KR" u="sng" dirty="0">
+                <a:solidFill>
+                  <a:srgbClr val="C00000"/>
+                </a:solidFill>
+              </a:rPr>
+              <a:t>(</a:t>
+            </a:r>
+            <a:r>
+              <a:rPr lang="ko-KR" altLang="en-US" u="sng" dirty="0">
+                <a:solidFill>
+                  <a:srgbClr val="C00000"/>
+                </a:solidFill>
+              </a:rPr>
+              <a:t>신뢰도 확보 필요</a:t>
+            </a:r>
+            <a:r>
+              <a:rPr lang="en-US" altLang="ko-KR" u="sng" dirty="0">
+                <a:solidFill>
+                  <a:srgbClr val="C00000"/>
+                </a:solidFill>
+              </a:rPr>
+              <a:t>)</a:t>
+            </a:r>
+          </a:p>
+          <a:p>
+            <a:pPr marL="285750" indent="-285750">
+              <a:buFont typeface="Symbol" panose="05050102010706020507" pitchFamily="18" charset="2"/>
+              <a:buChar char="Þ"/>
+            </a:pPr>
+            <a:endParaRPr lang="en-US" altLang="ko-KR" u="sng" dirty="0">
+              <a:solidFill>
+                <a:srgbClr val="C00000"/>
+              </a:solidFill>
+            </a:endParaRPr>
+          </a:p>
+          <a:p>
+            <a:r>
+              <a:rPr lang="en-US" altLang="ko-KR" u="sng" dirty="0">
+                <a:solidFill>
+                  <a:srgbClr val="C00000"/>
+                </a:solidFill>
+              </a:rPr>
+              <a:t>+) </a:t>
+            </a:r>
+            <a:r>
+              <a:rPr lang="ko-KR" altLang="en-US" u="sng" dirty="0">
+                <a:solidFill>
+                  <a:srgbClr val="C00000"/>
+                </a:solidFill>
+              </a:rPr>
+              <a:t>봉사 인스타그램</a:t>
+            </a:r>
+            <a:r>
+              <a:rPr lang="en-US" altLang="ko-KR" u="sng" dirty="0">
+                <a:solidFill>
+                  <a:srgbClr val="C00000"/>
+                </a:solidFill>
+              </a:rPr>
+              <a:t>: </a:t>
+            </a:r>
+            <a:r>
+              <a:rPr lang="ko-KR" altLang="en-US" u="sng" dirty="0">
+                <a:solidFill>
+                  <a:srgbClr val="C00000"/>
+                </a:solidFill>
+              </a:rPr>
+              <a:t>봉사를 장려</a:t>
+            </a:r>
           </a:p>
         </p:txBody>
       </p:sp>
@@ -10515,13 +10935,6 @@
   <p:clrMapOvr>
     <a:masterClrMapping/>
   </p:clrMapOvr>
-  <p:timing>
-    <p:tnLst>
-      <p:par>
-        <p:cTn id="1" dur="indefinite" restart="never" nodeType="tmRoot"/>
-      </p:par>
-    </p:tnLst>
-  </p:timing>
 </p:sld>
 </file>
 
@@ -10610,7 +11023,7 @@
           <a:lstStyle/>
           <a:p>
             <a:r>
-              <a:rPr lang="en-US" altLang="ko-KR" dirty="0" err="1" smtClean="0"/>
+              <a:rPr lang="en-US" altLang="ko-KR" dirty="0" err="1"/>
               <a:t>Review.tsx</a:t>
             </a:r>
             <a:endParaRPr lang="ko-KR" altLang="en-US" dirty="0"/>
@@ -10837,7 +11250,7 @@
           <a:p>
             <a:pPr algn="ctr"/>
             <a:r>
-              <a:rPr lang="en-US" altLang="ko-KR" dirty="0" smtClean="0"/>
+              <a:rPr lang="en-US" altLang="ko-KR" dirty="0"/>
               <a:t>&lt;Review&gt;</a:t>
             </a:r>
           </a:p>
@@ -10874,18 +11287,18 @@
               <a:buChar char="-"/>
             </a:pPr>
             <a:r>
-              <a:rPr lang="ko-KR" altLang="en-US" dirty="0" err="1" smtClean="0"/>
+              <a:rPr lang="ko-KR" altLang="en-US" dirty="0" err="1"/>
               <a:t>봉사공고에</a:t>
             </a:r>
             <a:r>
-              <a:rPr lang="ko-KR" altLang="en-US" dirty="0" smtClean="0"/>
+              <a:rPr lang="ko-KR" altLang="en-US" dirty="0"/>
               <a:t> 대한 정보를 포함한 </a:t>
             </a:r>
             <a:r>
-              <a:rPr lang="ko-KR" altLang="en-US" dirty="0" err="1" smtClean="0"/>
+              <a:rPr lang="ko-KR" altLang="en-US" dirty="0" err="1"/>
               <a:t>후기글</a:t>
             </a:r>
-            <a:endParaRPr lang="en-US" altLang="ko-KR" dirty="0" smtClean="0"/>
+            <a:endParaRPr lang="en-US" altLang="ko-KR" dirty="0"/>
           </a:p>
           <a:p>
             <a:pPr marL="285750" indent="-285750">
@@ -10893,30 +11306,30 @@
               <a:buChar char="Þ"/>
             </a:pPr>
             <a:r>
-              <a:rPr lang="ko-KR" altLang="en-US" dirty="0" smtClean="0"/>
+              <a:rPr lang="ko-KR" altLang="en-US" dirty="0"/>
               <a:t>해당 </a:t>
             </a:r>
             <a:r>
-              <a:rPr lang="ko-KR" altLang="en-US" dirty="0" err="1" smtClean="0"/>
+              <a:rPr lang="ko-KR" altLang="en-US" dirty="0" err="1"/>
               <a:t>후기글에</a:t>
             </a:r>
             <a:r>
-              <a:rPr lang="ko-KR" altLang="en-US" dirty="0" smtClean="0"/>
+              <a:rPr lang="ko-KR" altLang="en-US" dirty="0"/>
               <a:t> 연결된 </a:t>
             </a:r>
             <a:r>
-              <a:rPr lang="ko-KR" altLang="en-US" dirty="0" err="1" smtClean="0"/>
+              <a:rPr lang="ko-KR" altLang="en-US" dirty="0" err="1"/>
               <a:t>봉사사공고</a:t>
             </a:r>
             <a:r>
-              <a:rPr lang="ko-KR" altLang="en-US" dirty="0" smtClean="0"/>
+              <a:rPr lang="ko-KR" altLang="en-US" dirty="0"/>
               <a:t> </a:t>
             </a:r>
             <a:r>
-              <a:rPr lang="ko-KR" altLang="en-US" dirty="0" err="1" smtClean="0"/>
+              <a:rPr lang="ko-KR" altLang="en-US" dirty="0" err="1"/>
               <a:t>클릭시</a:t>
             </a:r>
-            <a:endParaRPr lang="en-US" altLang="ko-KR" dirty="0" smtClean="0"/>
+            <a:endParaRPr lang="en-US" altLang="ko-KR" dirty="0"/>
           </a:p>
           <a:p>
             <a:pPr marL="285750" indent="-285750">
@@ -10924,27 +11337,27 @@
               <a:buChar char="Þ"/>
             </a:pPr>
             <a:r>
-              <a:rPr lang="ko-KR" altLang="en-US" dirty="0" smtClean="0"/>
+              <a:rPr lang="ko-KR" altLang="en-US" dirty="0"/>
               <a:t>연결된 </a:t>
             </a:r>
             <a:r>
-              <a:rPr lang="en-US" altLang="ko-KR" dirty="0" err="1" smtClean="0"/>
+              <a:rPr lang="en-US" altLang="ko-KR" dirty="0" err="1"/>
               <a:t>Bong.tsx</a:t>
             </a:r>
             <a:r>
-              <a:rPr lang="ko-KR" altLang="en-US" dirty="0" smtClean="0"/>
+              <a:rPr lang="ko-KR" altLang="en-US" dirty="0"/>
               <a:t>로 이동</a:t>
             </a:r>
-            <a:endParaRPr lang="en-US" altLang="ko-KR" dirty="0" smtClean="0"/>
-          </a:p>
-          <a:p>
-            <a:endParaRPr lang="en-US" altLang="ko-KR" dirty="0" smtClean="0"/>
-          </a:p>
-          <a:p>
             <a:endParaRPr lang="en-US" altLang="ko-KR" dirty="0"/>
           </a:p>
           <a:p>
-            <a:endParaRPr lang="en-US" altLang="ko-KR" dirty="0" smtClean="0"/>
+            <a:endParaRPr lang="en-US" altLang="ko-KR" dirty="0"/>
+          </a:p>
+          <a:p>
+            <a:endParaRPr lang="en-US" altLang="ko-KR" dirty="0"/>
+          </a:p>
+          <a:p>
+            <a:endParaRPr lang="en-US" altLang="ko-KR" dirty="0"/>
           </a:p>
           <a:p>
             <a:pPr marL="285750" indent="-285750">
@@ -10959,10 +11372,10 @@
               <a:buChar char="-"/>
             </a:pPr>
             <a:r>
-              <a:rPr lang="ko-KR" altLang="en-US" dirty="0" smtClean="0"/>
+              <a:rPr lang="ko-KR" altLang="en-US" dirty="0"/>
               <a:t>사진과 함께 작성된 글 표시</a:t>
             </a:r>
-            <a:endParaRPr lang="en-US" altLang="ko-KR" dirty="0" smtClean="0"/>
+            <a:endParaRPr lang="en-US" altLang="ko-KR" dirty="0"/>
           </a:p>
           <a:p>
             <a:pPr marL="285750" indent="-285750">
@@ -10977,65 +11390,61 @@
               <a:buChar char="-"/>
             </a:pPr>
             <a:r>
-              <a:rPr lang="ko-KR" altLang="en-US" dirty="0" smtClean="0"/>
+              <a:rPr lang="ko-KR" altLang="en-US" dirty="0"/>
               <a:t>좋아요</a:t>
             </a:r>
             <a:r>
-              <a:rPr lang="en-US" altLang="ko-KR" dirty="0" smtClean="0"/>
+              <a:rPr lang="en-US" altLang="ko-KR" dirty="0"/>
               <a:t>, </a:t>
             </a:r>
             <a:r>
-              <a:rPr lang="ko-KR" altLang="en-US" dirty="0" smtClean="0"/>
+              <a:rPr lang="ko-KR" altLang="en-US" dirty="0"/>
               <a:t>댓글 기능 有</a:t>
             </a:r>
-            <a:endParaRPr lang="en-US" altLang="ko-KR" dirty="0" smtClean="0"/>
-          </a:p>
-          <a:p>
-            <a:r>
-              <a:rPr lang="en-US" altLang="ko-KR" dirty="0" smtClean="0"/>
+            <a:endParaRPr lang="en-US" altLang="ko-KR" dirty="0"/>
+          </a:p>
+          <a:p>
+            <a:r>
+              <a:rPr lang="en-US" altLang="ko-KR" dirty="0"/>
               <a:t>=&gt; </a:t>
             </a:r>
             <a:r>
-              <a:rPr lang="ko-KR" altLang="en-US" dirty="0" smtClean="0"/>
+              <a:rPr lang="ko-KR" altLang="en-US" dirty="0"/>
               <a:t>해당 유저 프로필 누르면 해당 유저의 </a:t>
             </a:r>
             <a:r>
-              <a:rPr lang="en-US" altLang="ko-KR" dirty="0" err="1" smtClean="0"/>
+              <a:rPr lang="en-US" altLang="ko-KR" dirty="0" err="1"/>
               <a:t>MyPage.tsx</a:t>
             </a:r>
             <a:r>
-              <a:rPr lang="ko-KR" altLang="en-US" dirty="0" smtClean="0"/>
+              <a:rPr lang="ko-KR" altLang="en-US" dirty="0"/>
               <a:t>로 이동</a:t>
             </a:r>
-            <a:r>
-              <a:rPr lang="en-US" altLang="ko-KR" dirty="0" smtClean="0"/>
-              <a:t/>
-            </a:r>
             <a:br>
-              <a:rPr lang="en-US" altLang="ko-KR" dirty="0" smtClean="0"/>
+              <a:rPr lang="en-US" altLang="ko-KR" dirty="0"/>
             </a:br>
             <a:r>
-              <a:rPr lang="en-US" altLang="ko-KR" dirty="0" smtClean="0"/>
+              <a:rPr lang="en-US" altLang="ko-KR" dirty="0"/>
               <a:t>(</a:t>
             </a:r>
             <a:r>
-              <a:rPr lang="ko-KR" altLang="en-US" dirty="0" err="1" smtClean="0"/>
+              <a:rPr lang="ko-KR" altLang="en-US" dirty="0" err="1"/>
               <a:t>팔로우</a:t>
             </a:r>
             <a:r>
-              <a:rPr lang="ko-KR" altLang="en-US" dirty="0" smtClean="0"/>
+              <a:rPr lang="ko-KR" altLang="en-US" dirty="0"/>
               <a:t> </a:t>
             </a:r>
             <a:r>
-              <a:rPr lang="en-US" altLang="ko-KR" dirty="0" smtClean="0"/>
+              <a:rPr lang="en-US" altLang="ko-KR" dirty="0"/>
               <a:t>- </a:t>
             </a:r>
             <a:r>
-              <a:rPr lang="ko-KR" altLang="en-US" dirty="0" err="1" smtClean="0"/>
+              <a:rPr lang="ko-KR" altLang="en-US" dirty="0" err="1"/>
               <a:t>일방형</a:t>
             </a:r>
             <a:r>
-              <a:rPr lang="en-US" altLang="ko-KR" dirty="0" smtClean="0"/>
+              <a:rPr lang="en-US" altLang="ko-KR" dirty="0"/>
               <a:t>)</a:t>
             </a:r>
           </a:p>
@@ -11150,7 +11559,7 @@
           <a:p>
             <a:pPr algn="ctr"/>
             <a:r>
-              <a:rPr lang="en-US" altLang="ko-KR" dirty="0" smtClean="0"/>
+              <a:rPr lang="en-US" altLang="ko-KR" dirty="0"/>
               <a:t>&lt;Bong&gt;</a:t>
             </a:r>
           </a:p>
@@ -11170,13 +11579,6 @@
   <p:clrMapOvr>
     <a:masterClrMapping/>
   </p:clrMapOvr>
-  <p:timing>
-    <p:tnLst>
-      <p:par>
-        <p:cTn id="1" dur="indefinite" restart="never" nodeType="tmRoot"/>
-      </p:par>
-    </p:tnLst>
-  </p:timing>
 </p:sld>
 </file>
 
@@ -11213,7 +11615,7 @@
           <a:lstStyle/>
           <a:p>
             <a:r>
-              <a:rPr lang="en-US" altLang="ko-KR" dirty="0" err="1" smtClean="0"/>
+              <a:rPr lang="en-US" altLang="ko-KR" dirty="0" err="1"/>
               <a:t>Search.tsx</a:t>
             </a:r>
             <a:endParaRPr lang="ko-KR" altLang="en-US" dirty="0"/>
@@ -11247,17 +11649,17 @@
               <a:buChar char="-"/>
             </a:pPr>
             <a:r>
-              <a:rPr lang="ko-KR" altLang="en-US" dirty="0" smtClean="0"/>
+              <a:rPr lang="ko-KR" altLang="en-US" dirty="0"/>
               <a:t>검색 키워드에 맞는 공고들 세로로 나열</a:t>
             </a:r>
-            <a:endParaRPr lang="en-US" altLang="ko-KR" dirty="0" smtClean="0"/>
+            <a:endParaRPr lang="en-US" altLang="ko-KR" dirty="0"/>
           </a:p>
           <a:p>
             <a:pPr marL="285750" indent="-285750">
               <a:buFontTx/>
               <a:buChar char="-"/>
             </a:pPr>
-            <a:endParaRPr lang="en-US" altLang="ko-KR" dirty="0" smtClean="0"/>
+            <a:endParaRPr lang="en-US" altLang="ko-KR" dirty="0"/>
           </a:p>
           <a:p>
             <a:pPr marL="285750" indent="-285750">
@@ -11265,22 +11667,21 @@
               <a:buChar char="-"/>
             </a:pPr>
             <a:r>
-              <a:rPr lang="ko-KR" altLang="en-US" dirty="0" err="1" smtClean="0"/>
+              <a:rPr lang="ko-KR" altLang="en-US" dirty="0" err="1"/>
               <a:t>클릭시</a:t>
             </a:r>
             <a:r>
-              <a:rPr lang="ko-KR" altLang="en-US" dirty="0" smtClean="0"/>
+              <a:rPr lang="ko-KR" altLang="en-US" dirty="0"/>
               <a:t> </a:t>
             </a:r>
             <a:r>
-              <a:rPr lang="en-US" altLang="ko-KR" dirty="0" err="1" smtClean="0"/>
+              <a:rPr lang="en-US" altLang="ko-KR" dirty="0" err="1"/>
               <a:t>Bong.tsx</a:t>
             </a:r>
             <a:r>
-              <a:rPr lang="ko-KR" altLang="en-US" dirty="0" smtClean="0"/>
+              <a:rPr lang="ko-KR" altLang="en-US" dirty="0"/>
               <a:t>로 이동</a:t>
             </a:r>
-            <a:endParaRPr lang="ko-KR" altLang="en-US" dirty="0"/>
           </a:p>
         </p:txBody>
       </p:sp>
@@ -11381,7 +11782,7 @@
           <a:p>
             <a:pPr algn="ctr"/>
             <a:r>
-              <a:rPr lang="ko-KR" altLang="en-US" smtClean="0">
+              <a:rPr lang="ko-KR" altLang="en-US">
                 <a:solidFill>
                   <a:schemeClr val="tx1"/>
                 </a:solidFill>
@@ -11482,7 +11883,7 @@
           <a:p>
             <a:pPr algn="ctr"/>
             <a:r>
-              <a:rPr lang="ko-KR" altLang="en-US" smtClean="0">
+              <a:rPr lang="ko-KR" altLang="en-US">
                 <a:solidFill>
                   <a:schemeClr val="tx1"/>
                 </a:solidFill>
@@ -11542,7 +11943,7 @@
           <a:p>
             <a:pPr algn="ctr"/>
             <a:r>
-              <a:rPr lang="ko-KR" altLang="en-US" smtClean="0">
+              <a:rPr lang="ko-KR" altLang="en-US">
                 <a:solidFill>
                   <a:schemeClr val="tx1"/>
                 </a:solidFill>
@@ -11883,7 +12284,7 @@
           <a:p>
             <a:pPr algn="ctr"/>
             <a:r>
-              <a:rPr lang="en-US" altLang="ko-KR" dirty="0" smtClean="0"/>
+              <a:rPr lang="en-US" altLang="ko-KR" dirty="0"/>
               <a:t>&lt;Bong&gt;</a:t>
             </a:r>
           </a:p>
@@ -11949,13 +12350,6 @@
   <p:clrMapOvr>
     <a:masterClrMapping/>
   </p:clrMapOvr>
-  <p:timing>
-    <p:tnLst>
-      <p:par>
-        <p:cTn id="1" dur="indefinite" restart="never" nodeType="tmRoot"/>
-      </p:par>
-    </p:tnLst>
-  </p:timing>
 </p:sld>
 </file>
 
@@ -11992,27 +12386,27 @@
           <a:lstStyle/>
           <a:p>
             <a:r>
-              <a:rPr lang="en-US" altLang="ko-KR" dirty="0" err="1" smtClean="0"/>
+              <a:rPr lang="en-US" altLang="ko-KR" dirty="0" err="1"/>
               <a:t>AddCard.tsx</a:t>
             </a:r>
             <a:r>
-              <a:rPr lang="en-US" altLang="ko-KR" dirty="0" smtClean="0"/>
+              <a:rPr lang="en-US" altLang="ko-KR" dirty="0"/>
               <a:t>(</a:t>
             </a:r>
             <a:r>
-              <a:rPr lang="ko-KR" altLang="en-US" dirty="0" smtClean="0"/>
+              <a:rPr lang="ko-KR" altLang="en-US" dirty="0"/>
               <a:t>비회원</a:t>
             </a:r>
             <a:r>
-              <a:rPr lang="en-US" altLang="ko-KR" dirty="0" smtClean="0"/>
+              <a:rPr lang="en-US" altLang="ko-KR" dirty="0"/>
               <a:t>-</a:t>
             </a:r>
             <a:r>
-              <a:rPr lang="en-US" altLang="ko-KR" dirty="0" err="1" smtClean="0"/>
+              <a:rPr lang="en-US" altLang="ko-KR" dirty="0" err="1"/>
               <a:t>Login.tsx</a:t>
             </a:r>
             <a:r>
-              <a:rPr lang="en-US" altLang="ko-KR" dirty="0" smtClean="0"/>
+              <a:rPr lang="en-US" altLang="ko-KR" dirty="0"/>
               <a:t>)</a:t>
             </a:r>
             <a:endParaRPr lang="ko-KR" altLang="en-US" dirty="0"/>
@@ -12046,10 +12440,10 @@
               <a:buChar char="-"/>
             </a:pPr>
             <a:r>
-              <a:rPr lang="ko-KR" altLang="en-US" dirty="0" smtClean="0"/>
+              <a:rPr lang="ko-KR" altLang="en-US" dirty="0"/>
               <a:t>공고 게시는 누구나 가능함</a:t>
             </a:r>
-            <a:endParaRPr lang="en-US" altLang="ko-KR" dirty="0" smtClean="0"/>
+            <a:endParaRPr lang="en-US" altLang="ko-KR" dirty="0"/>
           </a:p>
           <a:p>
             <a:pPr marL="285750" indent="-285750">
@@ -12063,7 +12457,7 @@
               <a:buFontTx/>
               <a:buChar char="-"/>
             </a:pPr>
-            <a:endParaRPr lang="en-US" altLang="ko-KR" dirty="0" smtClean="0"/>
+            <a:endParaRPr lang="en-US" altLang="ko-KR" dirty="0"/>
           </a:p>
           <a:p>
             <a:pPr marL="285750" indent="-285750">
@@ -12071,18 +12465,18 @@
               <a:buChar char="-"/>
             </a:pPr>
             <a:r>
-              <a:rPr lang="ko-KR" altLang="en-US" dirty="0" smtClean="0"/>
+              <a:rPr lang="ko-KR" altLang="en-US" dirty="0"/>
               <a:t>기관 담당자가 올릴 수도 있고</a:t>
             </a:r>
             <a:r>
-              <a:rPr lang="en-US" altLang="ko-KR" dirty="0" smtClean="0"/>
+              <a:rPr lang="en-US" altLang="ko-KR" dirty="0"/>
               <a:t>, </a:t>
             </a:r>
             <a:r>
-              <a:rPr lang="ko-KR" altLang="en-US" dirty="0" smtClean="0"/>
+              <a:rPr lang="ko-KR" altLang="en-US" dirty="0"/>
               <a:t>사용자가 올릴 수도 있음</a:t>
             </a:r>
-            <a:endParaRPr lang="en-US" altLang="ko-KR" dirty="0" smtClean="0"/>
+            <a:endParaRPr lang="en-US" altLang="ko-KR" dirty="0"/>
           </a:p>
           <a:p>
             <a:pPr marL="285750" indent="-285750">
@@ -12097,19 +12491,19 @@
               <a:buChar char="-"/>
             </a:pPr>
             <a:r>
-              <a:rPr lang="ko-KR" altLang="en-US" dirty="0" smtClean="0"/>
+              <a:rPr lang="ko-KR" altLang="en-US" dirty="0"/>
               <a:t>여기서 말하는 공고 게시는</a:t>
             </a:r>
             <a:r>
-              <a:rPr lang="en-US" altLang="ko-KR" dirty="0" smtClean="0"/>
+              <a:rPr lang="en-US" altLang="ko-KR" dirty="0"/>
               <a:t>, </a:t>
             </a:r>
             <a:r>
-              <a:rPr lang="ko-KR" altLang="en-US" dirty="0" smtClean="0"/>
+              <a:rPr lang="ko-KR" altLang="en-US" dirty="0"/>
               <a:t>다른 웹사이트에서 공고를 찾아와서 </a:t>
             </a:r>
             <a:r>
-              <a:rPr lang="en-US" altLang="ko-KR" b="1" u="sng" dirty="0" smtClean="0">
+              <a:rPr lang="en-US" altLang="ko-KR" b="1" u="sng" dirty="0">
                 <a:solidFill>
                   <a:srgbClr val="0070C0"/>
                 </a:solidFill>
@@ -12117,7 +12511,7 @@
               <a:t>“</a:t>
             </a:r>
             <a:r>
-              <a:rPr lang="ko-KR" altLang="en-US" b="1" u="sng" dirty="0" smtClean="0">
+              <a:rPr lang="ko-KR" altLang="en-US" b="1" u="sng" dirty="0">
                 <a:solidFill>
                   <a:srgbClr val="0070C0"/>
                 </a:solidFill>
@@ -12125,7 +12519,7 @@
               <a:t>공유</a:t>
             </a:r>
             <a:r>
-              <a:rPr lang="en-US" altLang="ko-KR" b="1" u="sng" dirty="0" smtClean="0">
+              <a:rPr lang="en-US" altLang="ko-KR" b="1" u="sng" dirty="0">
                 <a:solidFill>
                   <a:srgbClr val="0070C0"/>
                 </a:solidFill>
@@ -12133,7 +12527,7 @@
               <a:t>“ </a:t>
             </a:r>
             <a:r>
-              <a:rPr lang="ko-KR" altLang="en-US" b="1" u="sng" dirty="0" smtClean="0">
+              <a:rPr lang="ko-KR" altLang="en-US" b="1" u="sng" dirty="0">
                 <a:solidFill>
                   <a:srgbClr val="0070C0"/>
                 </a:solidFill>
@@ -12141,10 +12535,10 @@
               <a:t>해준다는 </a:t>
             </a:r>
             <a:r>
-              <a:rPr lang="ko-KR" altLang="en-US" dirty="0" smtClean="0"/>
+              <a:rPr lang="ko-KR" altLang="en-US" dirty="0"/>
               <a:t>개념이 강함</a:t>
             </a:r>
-            <a:endParaRPr lang="en-US" altLang="ko-KR" dirty="0" smtClean="0"/>
+            <a:endParaRPr lang="en-US" altLang="ko-KR" dirty="0"/>
           </a:p>
           <a:p>
             <a:pPr marL="285750" indent="-285750">
@@ -12158,7 +12552,7 @@
               <a:buFontTx/>
               <a:buChar char="-"/>
             </a:pPr>
-            <a:endParaRPr lang="en-US" altLang="ko-KR" dirty="0" smtClean="0"/>
+            <a:endParaRPr lang="en-US" altLang="ko-KR" dirty="0"/>
           </a:p>
           <a:p>
             <a:pPr marL="285750" indent="-285750">
@@ -12166,58 +12560,58 @@
               <a:buChar char="-"/>
             </a:pPr>
             <a:r>
-              <a:rPr lang="ko-KR" altLang="en-US" dirty="0" smtClean="0"/>
+              <a:rPr lang="ko-KR" altLang="en-US" dirty="0"/>
               <a:t>즉</a:t>
             </a:r>
             <a:r>
-              <a:rPr lang="en-US" altLang="ko-KR" dirty="0" smtClean="0"/>
+              <a:rPr lang="en-US" altLang="ko-KR" dirty="0"/>
               <a:t>, </a:t>
             </a:r>
             <a:r>
-              <a:rPr lang="ko-KR" altLang="en-US" dirty="0" smtClean="0"/>
+              <a:rPr lang="ko-KR" altLang="en-US" dirty="0"/>
               <a:t>서로 모를 수 있는 공고를 알려준다는 개념</a:t>
             </a:r>
-            <a:endParaRPr lang="en-US" altLang="ko-KR" dirty="0" smtClean="0"/>
-          </a:p>
-          <a:p>
-            <a:r>
-              <a:rPr lang="en-US" altLang="ko-KR" dirty="0" smtClean="0"/>
+            <a:endParaRPr lang="en-US" altLang="ko-KR" dirty="0"/>
+          </a:p>
+          <a:p>
+            <a:r>
+              <a:rPr lang="en-US" altLang="ko-KR" dirty="0"/>
               <a:t>(</a:t>
             </a:r>
             <a:r>
-              <a:rPr lang="ko-KR" altLang="en-US" dirty="0" smtClean="0"/>
+              <a:rPr lang="ko-KR" altLang="en-US" dirty="0"/>
               <a:t>기본은 </a:t>
             </a:r>
             <a:r>
-              <a:rPr lang="ko-KR" altLang="en-US" dirty="0" err="1" smtClean="0"/>
+              <a:rPr lang="ko-KR" altLang="en-US" dirty="0" err="1"/>
               <a:t>크롤링</a:t>
             </a:r>
             <a:r>
-              <a:rPr lang="ko-KR" altLang="en-US" dirty="0" smtClean="0"/>
+              <a:rPr lang="ko-KR" altLang="en-US" dirty="0"/>
               <a:t> </a:t>
             </a:r>
             <a:r>
-              <a:rPr lang="ko-KR" altLang="en-US" dirty="0" err="1" smtClean="0"/>
+              <a:rPr lang="ko-KR" altLang="en-US" dirty="0" err="1"/>
               <a:t>해올꺼지만</a:t>
             </a:r>
             <a:r>
-              <a:rPr lang="en-US" altLang="ko-KR" dirty="0" smtClean="0"/>
+              <a:rPr lang="en-US" altLang="ko-KR" dirty="0"/>
               <a:t>, </a:t>
             </a:r>
             <a:r>
-              <a:rPr lang="ko-KR" altLang="en-US" dirty="0" smtClean="0"/>
+              <a:rPr lang="ko-KR" altLang="en-US" dirty="0"/>
               <a:t>그 외에도 추가 공유하고 </a:t>
             </a:r>
             <a:r>
-              <a:rPr lang="ko-KR" altLang="en-US" dirty="0" err="1" smtClean="0"/>
+              <a:rPr lang="ko-KR" altLang="en-US" dirty="0" err="1"/>
               <a:t>싶을때</a:t>
             </a:r>
             <a:r>
-              <a:rPr lang="ko-KR" altLang="en-US" dirty="0" smtClean="0"/>
+              <a:rPr lang="ko-KR" altLang="en-US" dirty="0"/>
               <a:t> 사용</a:t>
             </a:r>
             <a:r>
-              <a:rPr lang="en-US" altLang="ko-KR" dirty="0" smtClean="0"/>
+              <a:rPr lang="en-US" altLang="ko-KR" dirty="0"/>
               <a:t>)</a:t>
             </a:r>
           </a:p>
@@ -12526,10 +12920,10 @@
               <a:buChar char="-"/>
             </a:pPr>
             <a:r>
-              <a:rPr lang="ko-KR" altLang="en-US" dirty="0" smtClean="0"/>
+              <a:rPr lang="ko-KR" altLang="en-US" dirty="0"/>
               <a:t>공고 객체에 넣을 내용 수동으로 작성</a:t>
             </a:r>
-            <a:endParaRPr lang="en-US" altLang="ko-KR" dirty="0" smtClean="0"/>
+            <a:endParaRPr lang="en-US" altLang="ko-KR" dirty="0"/>
           </a:p>
           <a:p>
             <a:pPr marL="285750" indent="-285750">
@@ -12537,18 +12931,13 @@
               <a:buChar char="-"/>
             </a:pPr>
             <a:r>
-              <a:rPr lang="ko-KR" altLang="en-US" u="sng" dirty="0" smtClean="0">
+              <a:rPr lang="ko-KR" altLang="en-US" u="sng" dirty="0">
                 <a:solidFill>
                   <a:srgbClr val="FF0000"/>
                 </a:solidFill>
               </a:rPr>
               <a:t>공고 사이트 링크必</a:t>
             </a:r>
-            <a:endParaRPr lang="ko-KR" altLang="en-US" u="sng" dirty="0">
-              <a:solidFill>
-                <a:srgbClr val="FF0000"/>
-              </a:solidFill>
-            </a:endParaRPr>
           </a:p>
         </p:txBody>
       </p:sp>
@@ -12589,10 +12978,9 @@
           <a:p>
             <a:pPr algn="ctr"/>
             <a:r>
-              <a:rPr lang="ko-KR" altLang="en-US" dirty="0" smtClean="0"/>
+              <a:rPr lang="ko-KR" altLang="en-US" dirty="0"/>
               <a:t>게시 버튼</a:t>
             </a:r>
-            <a:endParaRPr lang="ko-KR" altLang="en-US" dirty="0"/>
           </a:p>
         </p:txBody>
       </p:sp>
@@ -12633,7 +13021,7 @@
           <a:p>
             <a:pPr algn="ctr"/>
             <a:r>
-              <a:rPr lang="en-US" altLang="ko-KR" dirty="0" smtClean="0"/>
+              <a:rPr lang="en-US" altLang="ko-KR" dirty="0"/>
               <a:t>&lt;Bong&gt;</a:t>
             </a:r>
           </a:p>
@@ -12699,13 +13087,6 @@
   <p:clrMapOvr>
     <a:masterClrMapping/>
   </p:clrMapOvr>
-  <p:timing>
-    <p:tnLst>
-      <p:par>
-        <p:cTn id="1" dur="indefinite" restart="never" nodeType="tmRoot"/>
-      </p:par>
-    </p:tnLst>
-  </p:timing>
 </p:sld>
 </file>
 
